--- a/中越詩歌/愛我們的家_Yêu gia đình mình_v2.pptx
+++ b/中越詩歌/愛我們的家_Yêu gia đình mình_v2.pptx
@@ -112,6 +112,11 @@
       </a:defRPr>
     </a:lvl9pPr>
   </p:defaultTextStyle>
+  <p:extLst>
+    <p:ext uri="{EFAFB233-063F-42B5-8137-9DF3F51BA10A}">
+      <p15:sldGuideLst xmlns:p15="http://schemas.microsoft.com/office/powerpoint/2012/main"/>
+    </p:ext>
+  </p:extLst>
 </p:presentation>
 </file>
 
@@ -153,7 +158,7 @@
           <a:lstStyle/>
           <a:p>
             <a:r>
-              <a:rPr lang="en-US" altLang="zh-TW" smtClean="0"/>
+              <a:rPr lang="en-US" altLang="zh-TW"/>
               <a:t>Click to edit Master title style</a:t>
             </a:r>
             <a:endParaRPr lang="zh-TW" altLang="en-US"/>
@@ -272,7 +277,7 @@
           </a:lstStyle>
           <a:p>
             <a:r>
-              <a:rPr lang="en-US" altLang="zh-TW" smtClean="0"/>
+              <a:rPr lang="en-US" altLang="zh-TW"/>
               <a:t>Click to edit Master subtitle style</a:t>
             </a:r>
             <a:endParaRPr lang="zh-TW" altLang="en-US"/>
@@ -296,7 +301,7 @@
           <a:p>
             <a:fld id="{E803595F-A6B1-4F82-84CF-276E9D55F6F8}" type="datetimeFigureOut">
               <a:rPr lang="vi-VN" smtClean="0"/>
-              <a:t>03/05/2022</a:t>
+              <a:t>26/01/2025</a:t>
             </a:fld>
             <a:endParaRPr lang="vi-VN"/>
           </a:p>
@@ -390,7 +395,7 @@
           <a:lstStyle/>
           <a:p>
             <a:r>
-              <a:rPr lang="en-US" altLang="zh-TW" smtClean="0"/>
+              <a:rPr lang="en-US" altLang="zh-TW"/>
               <a:t>Click to edit Master title style</a:t>
             </a:r>
             <a:endParaRPr lang="zh-TW" altLang="en-US"/>
@@ -414,35 +419,35 @@
           <a:p>
             <a:pPr lvl="0"/>
             <a:r>
-              <a:rPr lang="en-US" altLang="zh-TW" smtClean="0"/>
+              <a:rPr lang="en-US" altLang="zh-TW"/>
               <a:t>Edit Master text styles</a:t>
             </a:r>
           </a:p>
           <a:p>
             <a:pPr lvl="1"/>
             <a:r>
-              <a:rPr lang="en-US" altLang="zh-TW" smtClean="0"/>
+              <a:rPr lang="en-US" altLang="zh-TW"/>
               <a:t>Second level</a:t>
             </a:r>
           </a:p>
           <a:p>
             <a:pPr lvl="2"/>
             <a:r>
-              <a:rPr lang="en-US" altLang="zh-TW" smtClean="0"/>
+              <a:rPr lang="en-US" altLang="zh-TW"/>
               <a:t>Third level</a:t>
             </a:r>
           </a:p>
           <a:p>
             <a:pPr lvl="3"/>
             <a:r>
-              <a:rPr lang="en-US" altLang="zh-TW" smtClean="0"/>
+              <a:rPr lang="en-US" altLang="zh-TW"/>
               <a:t>Fourth level</a:t>
             </a:r>
           </a:p>
           <a:p>
             <a:pPr lvl="4"/>
             <a:r>
-              <a:rPr lang="en-US" altLang="zh-TW" smtClean="0"/>
+              <a:rPr lang="en-US" altLang="zh-TW"/>
               <a:t>Fifth level</a:t>
             </a:r>
             <a:endParaRPr lang="zh-TW" altLang="en-US"/>
@@ -466,7 +471,7 @@
           <a:p>
             <a:fld id="{E803595F-A6B1-4F82-84CF-276E9D55F6F8}" type="datetimeFigureOut">
               <a:rPr lang="vi-VN" smtClean="0"/>
-              <a:t>03/05/2022</a:t>
+              <a:t>26/01/2025</a:t>
             </a:fld>
             <a:endParaRPr lang="vi-VN"/>
           </a:p>
@@ -565,7 +570,7 @@
           <a:lstStyle/>
           <a:p>
             <a:r>
-              <a:rPr lang="en-US" altLang="zh-TW" smtClean="0"/>
+              <a:rPr lang="en-US" altLang="zh-TW"/>
               <a:t>Click to edit Master title style</a:t>
             </a:r>
             <a:endParaRPr lang="zh-TW" altLang="en-US"/>
@@ -594,35 +599,35 @@
           <a:p>
             <a:pPr lvl="0"/>
             <a:r>
-              <a:rPr lang="en-US" altLang="zh-TW" smtClean="0"/>
+              <a:rPr lang="en-US" altLang="zh-TW"/>
               <a:t>Edit Master text styles</a:t>
             </a:r>
           </a:p>
           <a:p>
             <a:pPr lvl="1"/>
             <a:r>
-              <a:rPr lang="en-US" altLang="zh-TW" smtClean="0"/>
+              <a:rPr lang="en-US" altLang="zh-TW"/>
               <a:t>Second level</a:t>
             </a:r>
           </a:p>
           <a:p>
             <a:pPr lvl="2"/>
             <a:r>
-              <a:rPr lang="en-US" altLang="zh-TW" smtClean="0"/>
+              <a:rPr lang="en-US" altLang="zh-TW"/>
               <a:t>Third level</a:t>
             </a:r>
           </a:p>
           <a:p>
             <a:pPr lvl="3"/>
             <a:r>
-              <a:rPr lang="en-US" altLang="zh-TW" smtClean="0"/>
+              <a:rPr lang="en-US" altLang="zh-TW"/>
               <a:t>Fourth level</a:t>
             </a:r>
           </a:p>
           <a:p>
             <a:pPr lvl="4"/>
             <a:r>
-              <a:rPr lang="en-US" altLang="zh-TW" smtClean="0"/>
+              <a:rPr lang="en-US" altLang="zh-TW"/>
               <a:t>Fifth level</a:t>
             </a:r>
             <a:endParaRPr lang="zh-TW" altLang="en-US"/>
@@ -646,7 +651,7 @@
           <a:p>
             <a:fld id="{E803595F-A6B1-4F82-84CF-276E9D55F6F8}" type="datetimeFigureOut">
               <a:rPr lang="vi-VN" smtClean="0"/>
-              <a:t>03/05/2022</a:t>
+              <a:t>26/01/2025</a:t>
             </a:fld>
             <a:endParaRPr lang="vi-VN"/>
           </a:p>
@@ -740,7 +745,7 @@
           <a:lstStyle/>
           <a:p>
             <a:r>
-              <a:rPr lang="en-US" altLang="zh-TW" smtClean="0"/>
+              <a:rPr lang="en-US" altLang="zh-TW"/>
               <a:t>Click to edit Master title style</a:t>
             </a:r>
             <a:endParaRPr lang="zh-TW" altLang="en-US"/>
@@ -764,35 +769,35 @@
           <a:p>
             <a:pPr lvl="0"/>
             <a:r>
-              <a:rPr lang="en-US" altLang="zh-TW" smtClean="0"/>
+              <a:rPr lang="en-US" altLang="zh-TW"/>
               <a:t>Edit Master text styles</a:t>
             </a:r>
           </a:p>
           <a:p>
             <a:pPr lvl="1"/>
             <a:r>
-              <a:rPr lang="en-US" altLang="zh-TW" smtClean="0"/>
+              <a:rPr lang="en-US" altLang="zh-TW"/>
               <a:t>Second level</a:t>
             </a:r>
           </a:p>
           <a:p>
             <a:pPr lvl="2"/>
             <a:r>
-              <a:rPr lang="en-US" altLang="zh-TW" smtClean="0"/>
+              <a:rPr lang="en-US" altLang="zh-TW"/>
               <a:t>Third level</a:t>
             </a:r>
           </a:p>
           <a:p>
             <a:pPr lvl="3"/>
             <a:r>
-              <a:rPr lang="en-US" altLang="zh-TW" smtClean="0"/>
+              <a:rPr lang="en-US" altLang="zh-TW"/>
               <a:t>Fourth level</a:t>
             </a:r>
           </a:p>
           <a:p>
             <a:pPr lvl="4"/>
             <a:r>
-              <a:rPr lang="en-US" altLang="zh-TW" smtClean="0"/>
+              <a:rPr lang="en-US" altLang="zh-TW"/>
               <a:t>Fifth level</a:t>
             </a:r>
             <a:endParaRPr lang="zh-TW" altLang="en-US"/>
@@ -816,7 +821,7 @@
           <a:p>
             <a:fld id="{E803595F-A6B1-4F82-84CF-276E9D55F6F8}" type="datetimeFigureOut">
               <a:rPr lang="vi-VN" smtClean="0"/>
-              <a:t>03/05/2022</a:t>
+              <a:t>26/01/2025</a:t>
             </a:fld>
             <a:endParaRPr lang="vi-VN"/>
           </a:p>
@@ -919,7 +924,7 @@
           </a:lstStyle>
           <a:p>
             <a:r>
-              <a:rPr lang="en-US" altLang="zh-TW" smtClean="0"/>
+              <a:rPr lang="en-US" altLang="zh-TW"/>
               <a:t>Click to edit Master title style</a:t>
             </a:r>
             <a:endParaRPr lang="zh-TW" altLang="en-US"/>
@@ -1039,7 +1044,7 @@
           <a:p>
             <a:pPr lvl="0"/>
             <a:r>
-              <a:rPr lang="en-US" altLang="zh-TW" smtClean="0"/>
+              <a:rPr lang="en-US" altLang="zh-TW"/>
               <a:t>Edit Master text styles</a:t>
             </a:r>
           </a:p>
@@ -1062,7 +1067,7 @@
           <a:p>
             <a:fld id="{E803595F-A6B1-4F82-84CF-276E9D55F6F8}" type="datetimeFigureOut">
               <a:rPr lang="vi-VN" smtClean="0"/>
-              <a:t>03/05/2022</a:t>
+              <a:t>26/01/2025</a:t>
             </a:fld>
             <a:endParaRPr lang="vi-VN"/>
           </a:p>
@@ -1156,7 +1161,7 @@
           <a:lstStyle/>
           <a:p>
             <a:r>
-              <a:rPr lang="en-US" altLang="zh-TW" smtClean="0"/>
+              <a:rPr lang="en-US" altLang="zh-TW"/>
               <a:t>Click to edit Master title style</a:t>
             </a:r>
             <a:endParaRPr lang="zh-TW" altLang="en-US"/>
@@ -1213,35 +1218,35 @@
           <a:p>
             <a:pPr lvl="0"/>
             <a:r>
-              <a:rPr lang="en-US" altLang="zh-TW" smtClean="0"/>
+              <a:rPr lang="en-US" altLang="zh-TW"/>
               <a:t>Edit Master text styles</a:t>
             </a:r>
           </a:p>
           <a:p>
             <a:pPr lvl="1"/>
             <a:r>
-              <a:rPr lang="en-US" altLang="zh-TW" smtClean="0"/>
+              <a:rPr lang="en-US" altLang="zh-TW"/>
               <a:t>Second level</a:t>
             </a:r>
           </a:p>
           <a:p>
             <a:pPr lvl="2"/>
             <a:r>
-              <a:rPr lang="en-US" altLang="zh-TW" smtClean="0"/>
+              <a:rPr lang="en-US" altLang="zh-TW"/>
               <a:t>Third level</a:t>
             </a:r>
           </a:p>
           <a:p>
             <a:pPr lvl="3"/>
             <a:r>
-              <a:rPr lang="en-US" altLang="zh-TW" smtClean="0"/>
+              <a:rPr lang="en-US" altLang="zh-TW"/>
               <a:t>Fourth level</a:t>
             </a:r>
           </a:p>
           <a:p>
             <a:pPr lvl="4"/>
             <a:r>
-              <a:rPr lang="en-US" altLang="zh-TW" smtClean="0"/>
+              <a:rPr lang="en-US" altLang="zh-TW"/>
               <a:t>Fifth level</a:t>
             </a:r>
             <a:endParaRPr lang="zh-TW" altLang="en-US"/>
@@ -1298,35 +1303,35 @@
           <a:p>
             <a:pPr lvl="0"/>
             <a:r>
-              <a:rPr lang="en-US" altLang="zh-TW" smtClean="0"/>
+              <a:rPr lang="en-US" altLang="zh-TW"/>
               <a:t>Edit Master text styles</a:t>
             </a:r>
           </a:p>
           <a:p>
             <a:pPr lvl="1"/>
             <a:r>
-              <a:rPr lang="en-US" altLang="zh-TW" smtClean="0"/>
+              <a:rPr lang="en-US" altLang="zh-TW"/>
               <a:t>Second level</a:t>
             </a:r>
           </a:p>
           <a:p>
             <a:pPr lvl="2"/>
             <a:r>
-              <a:rPr lang="en-US" altLang="zh-TW" smtClean="0"/>
+              <a:rPr lang="en-US" altLang="zh-TW"/>
               <a:t>Third level</a:t>
             </a:r>
           </a:p>
           <a:p>
             <a:pPr lvl="3"/>
             <a:r>
-              <a:rPr lang="en-US" altLang="zh-TW" smtClean="0"/>
+              <a:rPr lang="en-US" altLang="zh-TW"/>
               <a:t>Fourth level</a:t>
             </a:r>
           </a:p>
           <a:p>
             <a:pPr lvl="4"/>
             <a:r>
-              <a:rPr lang="en-US" altLang="zh-TW" smtClean="0"/>
+              <a:rPr lang="en-US" altLang="zh-TW"/>
               <a:t>Fifth level</a:t>
             </a:r>
             <a:endParaRPr lang="zh-TW" altLang="en-US"/>
@@ -1350,7 +1355,7 @@
           <a:p>
             <a:fld id="{E803595F-A6B1-4F82-84CF-276E9D55F6F8}" type="datetimeFigureOut">
               <a:rPr lang="vi-VN" smtClean="0"/>
-              <a:t>03/05/2022</a:t>
+              <a:t>26/01/2025</a:t>
             </a:fld>
             <a:endParaRPr lang="vi-VN"/>
           </a:p>
@@ -1448,7 +1453,7 @@
           </a:lstStyle>
           <a:p>
             <a:r>
-              <a:rPr lang="en-US" altLang="zh-TW" smtClean="0"/>
+              <a:rPr lang="en-US" altLang="zh-TW"/>
               <a:t>Click to edit Master title style</a:t>
             </a:r>
             <a:endParaRPr lang="zh-TW" altLang="en-US"/>
@@ -1514,7 +1519,7 @@
           <a:p>
             <a:pPr lvl="0"/>
             <a:r>
-              <a:rPr lang="en-US" altLang="zh-TW" smtClean="0"/>
+              <a:rPr lang="en-US" altLang="zh-TW"/>
               <a:t>Edit Master text styles</a:t>
             </a:r>
           </a:p>
@@ -1570,35 +1575,35 @@
           <a:p>
             <a:pPr lvl="0"/>
             <a:r>
-              <a:rPr lang="en-US" altLang="zh-TW" smtClean="0"/>
+              <a:rPr lang="en-US" altLang="zh-TW"/>
               <a:t>Edit Master text styles</a:t>
             </a:r>
           </a:p>
           <a:p>
             <a:pPr lvl="1"/>
             <a:r>
-              <a:rPr lang="en-US" altLang="zh-TW" smtClean="0"/>
+              <a:rPr lang="en-US" altLang="zh-TW"/>
               <a:t>Second level</a:t>
             </a:r>
           </a:p>
           <a:p>
             <a:pPr lvl="2"/>
             <a:r>
-              <a:rPr lang="en-US" altLang="zh-TW" smtClean="0"/>
+              <a:rPr lang="en-US" altLang="zh-TW"/>
               <a:t>Third level</a:t>
             </a:r>
           </a:p>
           <a:p>
             <a:pPr lvl="3"/>
             <a:r>
-              <a:rPr lang="en-US" altLang="zh-TW" smtClean="0"/>
+              <a:rPr lang="en-US" altLang="zh-TW"/>
               <a:t>Fourth level</a:t>
             </a:r>
           </a:p>
           <a:p>
             <a:pPr lvl="4"/>
             <a:r>
-              <a:rPr lang="en-US" altLang="zh-TW" smtClean="0"/>
+              <a:rPr lang="en-US" altLang="zh-TW"/>
               <a:t>Fifth level</a:t>
             </a:r>
             <a:endParaRPr lang="zh-TW" altLang="en-US"/>
@@ -1664,7 +1669,7 @@
           <a:p>
             <a:pPr lvl="0"/>
             <a:r>
-              <a:rPr lang="en-US" altLang="zh-TW" smtClean="0"/>
+              <a:rPr lang="en-US" altLang="zh-TW"/>
               <a:t>Edit Master text styles</a:t>
             </a:r>
           </a:p>
@@ -1720,35 +1725,35 @@
           <a:p>
             <a:pPr lvl="0"/>
             <a:r>
-              <a:rPr lang="en-US" altLang="zh-TW" smtClean="0"/>
+              <a:rPr lang="en-US" altLang="zh-TW"/>
               <a:t>Edit Master text styles</a:t>
             </a:r>
           </a:p>
           <a:p>
             <a:pPr lvl="1"/>
             <a:r>
-              <a:rPr lang="en-US" altLang="zh-TW" smtClean="0"/>
+              <a:rPr lang="en-US" altLang="zh-TW"/>
               <a:t>Second level</a:t>
             </a:r>
           </a:p>
           <a:p>
             <a:pPr lvl="2"/>
             <a:r>
-              <a:rPr lang="en-US" altLang="zh-TW" smtClean="0"/>
+              <a:rPr lang="en-US" altLang="zh-TW"/>
               <a:t>Third level</a:t>
             </a:r>
           </a:p>
           <a:p>
             <a:pPr lvl="3"/>
             <a:r>
-              <a:rPr lang="en-US" altLang="zh-TW" smtClean="0"/>
+              <a:rPr lang="en-US" altLang="zh-TW"/>
               <a:t>Fourth level</a:t>
             </a:r>
           </a:p>
           <a:p>
             <a:pPr lvl="4"/>
             <a:r>
-              <a:rPr lang="en-US" altLang="zh-TW" smtClean="0"/>
+              <a:rPr lang="en-US" altLang="zh-TW"/>
               <a:t>Fifth level</a:t>
             </a:r>
             <a:endParaRPr lang="zh-TW" altLang="en-US"/>
@@ -1772,7 +1777,7 @@
           <a:p>
             <a:fld id="{E803595F-A6B1-4F82-84CF-276E9D55F6F8}" type="datetimeFigureOut">
               <a:rPr lang="vi-VN" smtClean="0"/>
-              <a:t>03/05/2022</a:t>
+              <a:t>26/01/2025</a:t>
             </a:fld>
             <a:endParaRPr lang="vi-VN"/>
           </a:p>
@@ -1866,7 +1871,7 @@
           <a:lstStyle/>
           <a:p>
             <a:r>
-              <a:rPr lang="en-US" altLang="zh-TW" smtClean="0"/>
+              <a:rPr lang="en-US" altLang="zh-TW"/>
               <a:t>Click to edit Master title style</a:t>
             </a:r>
             <a:endParaRPr lang="zh-TW" altLang="en-US"/>
@@ -1890,7 +1895,7 @@
           <a:p>
             <a:fld id="{E803595F-A6B1-4F82-84CF-276E9D55F6F8}" type="datetimeFigureOut">
               <a:rPr lang="vi-VN" smtClean="0"/>
-              <a:t>03/05/2022</a:t>
+              <a:t>26/01/2025</a:t>
             </a:fld>
             <a:endParaRPr lang="vi-VN"/>
           </a:p>
@@ -1985,7 +1990,7 @@
           <a:p>
             <a:fld id="{E803595F-A6B1-4F82-84CF-276E9D55F6F8}" type="datetimeFigureOut">
               <a:rPr lang="vi-VN" smtClean="0"/>
-              <a:t>03/05/2022</a:t>
+              <a:t>26/01/2025</a:t>
             </a:fld>
             <a:endParaRPr lang="vi-VN"/>
           </a:p>
@@ -2088,7 +2093,7 @@
           </a:lstStyle>
           <a:p>
             <a:r>
-              <a:rPr lang="en-US" altLang="zh-TW" smtClean="0"/>
+              <a:rPr lang="en-US" altLang="zh-TW"/>
               <a:t>Click to edit Master title style</a:t>
             </a:r>
             <a:endParaRPr lang="zh-TW" altLang="en-US"/>
@@ -2145,35 +2150,35 @@
           <a:p>
             <a:pPr lvl="0"/>
             <a:r>
-              <a:rPr lang="en-US" altLang="zh-TW" smtClean="0"/>
+              <a:rPr lang="en-US" altLang="zh-TW"/>
               <a:t>Edit Master text styles</a:t>
             </a:r>
           </a:p>
           <a:p>
             <a:pPr lvl="1"/>
             <a:r>
-              <a:rPr lang="en-US" altLang="zh-TW" smtClean="0"/>
+              <a:rPr lang="en-US" altLang="zh-TW"/>
               <a:t>Second level</a:t>
             </a:r>
           </a:p>
           <a:p>
             <a:pPr lvl="2"/>
             <a:r>
-              <a:rPr lang="en-US" altLang="zh-TW" smtClean="0"/>
+              <a:rPr lang="en-US" altLang="zh-TW"/>
               <a:t>Third level</a:t>
             </a:r>
           </a:p>
           <a:p>
             <a:pPr lvl="3"/>
             <a:r>
-              <a:rPr lang="en-US" altLang="zh-TW" smtClean="0"/>
+              <a:rPr lang="en-US" altLang="zh-TW"/>
               <a:t>Fourth level</a:t>
             </a:r>
           </a:p>
           <a:p>
             <a:pPr lvl="4"/>
             <a:r>
-              <a:rPr lang="en-US" altLang="zh-TW" smtClean="0"/>
+              <a:rPr lang="en-US" altLang="zh-TW"/>
               <a:t>Fifth level</a:t>
             </a:r>
             <a:endParaRPr lang="zh-TW" altLang="en-US"/>
@@ -2239,7 +2244,7 @@
           <a:p>
             <a:pPr lvl="0"/>
             <a:r>
-              <a:rPr lang="en-US" altLang="zh-TW" smtClean="0"/>
+              <a:rPr lang="en-US" altLang="zh-TW"/>
               <a:t>Edit Master text styles</a:t>
             </a:r>
           </a:p>
@@ -2262,7 +2267,7 @@
           <a:p>
             <a:fld id="{E803595F-A6B1-4F82-84CF-276E9D55F6F8}" type="datetimeFigureOut">
               <a:rPr lang="vi-VN" smtClean="0"/>
-              <a:t>03/05/2022</a:t>
+              <a:t>26/01/2025</a:t>
             </a:fld>
             <a:endParaRPr lang="vi-VN"/>
           </a:p>
@@ -2365,7 +2370,7 @@
           </a:lstStyle>
           <a:p>
             <a:r>
-              <a:rPr lang="en-US" altLang="zh-TW" smtClean="0"/>
+              <a:rPr lang="en-US" altLang="zh-TW"/>
               <a:t>Click to edit Master title style</a:t>
             </a:r>
             <a:endParaRPr lang="zh-TW" altLang="en-US"/>
@@ -2430,7 +2435,7 @@
           </a:lstStyle>
           <a:p>
             <a:r>
-              <a:rPr lang="en-US" altLang="zh-TW" smtClean="0"/>
+              <a:rPr lang="en-US" altLang="zh-TW"/>
               <a:t>Click icon to add picture</a:t>
             </a:r>
             <a:endParaRPr lang="zh-TW" altLang="en-US"/>
@@ -2496,7 +2501,7 @@
           <a:p>
             <a:pPr lvl="0"/>
             <a:r>
-              <a:rPr lang="en-US" altLang="zh-TW" smtClean="0"/>
+              <a:rPr lang="en-US" altLang="zh-TW"/>
               <a:t>Edit Master text styles</a:t>
             </a:r>
           </a:p>
@@ -2519,7 +2524,7 @@
           <a:p>
             <a:fld id="{E803595F-A6B1-4F82-84CF-276E9D55F6F8}" type="datetimeFigureOut">
               <a:rPr lang="vi-VN" smtClean="0"/>
-              <a:t>03/05/2022</a:t>
+              <a:t>26/01/2025</a:t>
             </a:fld>
             <a:endParaRPr lang="vi-VN"/>
           </a:p>
@@ -2633,10 +2638,9 @@
           <a:lstStyle/>
           <a:p>
             <a:r>
-              <a:rPr lang="zh-TW" altLang="en-US" smtClean="0"/>
+              <a:rPr lang="zh-TW" altLang="en-US"/>
               <a:t>按一下以編輯母片標題樣式</a:t>
             </a:r>
-            <a:endParaRPr lang="zh-TW" altLang="en-US"/>
           </a:p>
         </p:txBody>
       </p:sp>
@@ -2667,38 +2671,37 @@
           <a:p>
             <a:pPr lvl="0"/>
             <a:r>
-              <a:rPr lang="zh-TW" altLang="en-US" smtClean="0"/>
+              <a:rPr lang="zh-TW" altLang="en-US"/>
               <a:t>按一下以編輯母片文字樣式</a:t>
             </a:r>
           </a:p>
           <a:p>
             <a:pPr lvl="1"/>
             <a:r>
-              <a:rPr lang="zh-TW" altLang="en-US" smtClean="0"/>
+              <a:rPr lang="zh-TW" altLang="en-US"/>
               <a:t>第二層</a:t>
             </a:r>
           </a:p>
           <a:p>
             <a:pPr lvl="2"/>
             <a:r>
-              <a:rPr lang="zh-TW" altLang="en-US" smtClean="0"/>
+              <a:rPr lang="zh-TW" altLang="en-US"/>
               <a:t>第三層</a:t>
             </a:r>
           </a:p>
           <a:p>
             <a:pPr lvl="3"/>
             <a:r>
-              <a:rPr lang="zh-TW" altLang="en-US" smtClean="0"/>
+              <a:rPr lang="zh-TW" altLang="en-US"/>
               <a:t>第四層</a:t>
             </a:r>
           </a:p>
           <a:p>
             <a:pPr lvl="4"/>
             <a:r>
-              <a:rPr lang="zh-TW" altLang="en-US" smtClean="0"/>
+              <a:rPr lang="zh-TW" altLang="en-US"/>
               <a:t>第五層</a:t>
             </a:r>
-            <a:endParaRPr lang="zh-TW" altLang="en-US"/>
           </a:p>
         </p:txBody>
       </p:sp>
@@ -2737,7 +2740,7 @@
           <a:p>
             <a:fld id="{E803595F-A6B1-4F82-84CF-276E9D55F6F8}" type="datetimeFigureOut">
               <a:rPr lang="vi-VN" smtClean="0"/>
-              <a:t>03/05/2022</a:t>
+              <a:t>26/01/2025</a:t>
             </a:fld>
             <a:endParaRPr lang="vi-VN"/>
           </a:p>
@@ -3135,7 +3138,7 @@
           <a:lstStyle/>
           <a:p>
             <a:r>
-              <a:rPr lang="zh-TW" altLang="en-US" sz="7200" b="1" i="1" dirty="0" smtClean="0">
+              <a:rPr lang="zh-TW" altLang="en-US" sz="7200" b="1" i="1" dirty="0">
                 <a:solidFill>
                   <a:srgbClr val="000066"/>
                 </a:solidFill>
@@ -3149,24 +3152,7 @@
                 <a:latin typeface="微軟正黑體" pitchFamily="34" charset="-120"/>
                 <a:ea typeface="微軟正黑體" pitchFamily="34" charset="-120"/>
               </a:rPr>
-              <a:t>愛</a:t>
-            </a:r>
-            <a:r>
-              <a:rPr lang="zh-TW" altLang="en-US" sz="7200" b="1" i="1" dirty="0">
-                <a:solidFill>
-                  <a:srgbClr val="000066"/>
-                </a:solidFill>
-                <a:effectLst>
-                  <a:outerShdw blurRad="38100" dist="38100" dir="2700000" algn="tl">
-                    <a:srgbClr val="000000">
-                      <a:alpha val="43137"/>
-                    </a:srgbClr>
-                  </a:outerShdw>
-                </a:effectLst>
-                <a:latin typeface="微軟正黑體" pitchFamily="34" charset="-120"/>
-                <a:ea typeface="微軟正黑體" pitchFamily="34" charset="-120"/>
-              </a:rPr>
-              <a:t>我們的家</a:t>
+              <a:t>愛我們的家</a:t>
             </a:r>
           </a:p>
         </p:txBody>
@@ -3210,7 +3196,7 @@
           </a:lstStyle>
           <a:p>
             <a:r>
-              <a:rPr lang="en-US" sz="5400" b="1" i="1" dirty="0" err="1" smtClean="0">
+              <a:rPr lang="en-US" sz="5400" b="1" i="1" dirty="0" err="1">
                 <a:solidFill>
                   <a:srgbClr val="660033"/>
                 </a:solidFill>
@@ -3228,7 +3214,7 @@
               <a:t>Yêu</a:t>
             </a:r>
             <a:r>
-              <a:rPr lang="en-US" sz="5400" b="1" i="1" dirty="0" smtClean="0">
+              <a:rPr lang="en-US" sz="5400" b="1" i="1" dirty="0">
                 <a:solidFill>
                   <a:srgbClr val="660033"/>
                 </a:solidFill>
@@ -3409,24 +3395,14 @@
               <a:buNone/>
             </a:pPr>
             <a:r>
-              <a:rPr lang="zh-TW" altLang="en-US" sz="6400" b="1" spc="-1" dirty="0" smtClean="0">
+              <a:rPr lang="zh-TW" altLang="en-US" sz="6400" b="1" spc="-1" dirty="0">
                 <a:solidFill>
                   <a:srgbClr val="000066"/>
                 </a:solidFill>
                 <a:latin typeface="微軟正黑體"/>
                 <a:ea typeface="微軟正黑體"/>
               </a:rPr>
-              <a:t>每</a:t>
-            </a:r>
-            <a:r>
-              <a:rPr lang="zh-TW" altLang="en-US" sz="6400" b="1" spc="-1" dirty="0">
-                <a:solidFill>
-                  <a:srgbClr val="000066"/>
-                </a:solidFill>
-                <a:latin typeface="微軟正黑體"/>
-                <a:ea typeface="微軟正黑體"/>
-              </a:rPr>
-              <a:t>個人愛他家就有光彩</a:t>
+              <a:t>每個人愛他家就有光彩</a:t>
             </a:r>
             <a:endParaRPr lang="en-US" altLang="zh-CN" sz="6400" b="1" spc="-1" dirty="0">
               <a:solidFill>
@@ -3601,7 +3577,7 @@
               <a:buNone/>
             </a:pPr>
             <a:r>
-              <a:rPr lang="en-US" sz="3600" b="1" dirty="0" err="1" smtClean="0">
+              <a:rPr lang="en-US" sz="3600" b="1" dirty="0" err="1">
                 <a:solidFill>
                   <a:srgbClr val="660033"/>
                 </a:solidFill>
@@ -3610,7 +3586,7 @@
               <a:t>Nếu</a:t>
             </a:r>
             <a:r>
-              <a:rPr lang="en-US" sz="3600" b="1" dirty="0" smtClean="0">
+              <a:rPr lang="en-US" sz="3600" b="1" dirty="0">
                 <a:solidFill>
                   <a:srgbClr val="660033"/>
                 </a:solidFill>
@@ -3852,7 +3828,7 @@
               <a:t>( </a:t>
             </a:r>
             <a:r>
-              <a:rPr lang="zh-CN" altLang="en-US" sz="4400" b="1" dirty="0" smtClean="0">
+              <a:rPr lang="zh-CN" altLang="en-US" sz="4400" b="1" dirty="0">
                 <a:solidFill>
                   <a:srgbClr val="000066"/>
                 </a:solidFill>
@@ -3861,10 +3837,10 @@
                 <a:ea typeface="Microsoft JhengHei" panose="020B0604030504040204" pitchFamily="34" charset="-120"/>
                 <a:cs typeface="Arial" panose="020B0604020202020204" pitchFamily="34" charset="0"/>
               </a:rPr>
-              <a:t>正</a:t>
-            </a:r>
-            <a:r>
-              <a:rPr lang="en-US" sz="4400" b="1" dirty="0" smtClean="0">
+              <a:t>正歌</a:t>
+            </a:r>
+            <a:r>
+              <a:rPr lang="en-US" sz="4400" b="1" dirty="0">
                 <a:solidFill>
                   <a:srgbClr val="000066"/>
                 </a:solidFill>
@@ -3873,19 +3849,7 @@
                 <a:ea typeface="Microsoft JhengHei" panose="020B0604030504040204" pitchFamily="34" charset="-120"/>
                 <a:cs typeface="Arial" panose="020B0604020202020204" pitchFamily="34" charset="0"/>
               </a:rPr>
-              <a:t> </a:t>
-            </a:r>
-            <a:r>
-              <a:rPr lang="en-US" sz="4400" b="1" dirty="0">
-                <a:solidFill>
-                  <a:srgbClr val="000066"/>
-                </a:solidFill>
-                <a:effectLst/>
-                <a:latin typeface="Microsoft JhengHei" panose="020B0604030504040204" pitchFamily="34" charset="-120"/>
-                <a:ea typeface="Microsoft JhengHei" panose="020B0604030504040204" pitchFamily="34" charset="-120"/>
-                <a:cs typeface="Arial" panose="020B0604020202020204" pitchFamily="34" charset="0"/>
-              </a:rPr>
-              <a:t>)</a:t>
+              <a:t> )</a:t>
             </a:r>
             <a:endParaRPr lang="vi-VN" sz="4400" b="1" dirty="0">
               <a:solidFill>
@@ -4406,7 +4370,7 @@
               <a:t>( </a:t>
             </a:r>
             <a:r>
-              <a:rPr lang="zh-CN" altLang="en-US" sz="4400" b="1" dirty="0" smtClean="0">
+              <a:rPr lang="zh-CN" altLang="en-US" sz="4400" b="1" dirty="0">
                 <a:solidFill>
                   <a:srgbClr val="000066"/>
                 </a:solidFill>
@@ -4415,10 +4379,10 @@
                 <a:ea typeface="Microsoft JhengHei" panose="020B0604030504040204" pitchFamily="34" charset="-120"/>
                 <a:cs typeface="Arial" panose="020B0604020202020204" pitchFamily="34" charset="0"/>
               </a:rPr>
-              <a:t>正</a:t>
-            </a:r>
-            <a:r>
-              <a:rPr lang="en-US" sz="4400" b="1" dirty="0" smtClean="0">
+              <a:t>正歌</a:t>
+            </a:r>
+            <a:r>
+              <a:rPr lang="en-US" sz="4400" b="1" dirty="0">
                 <a:solidFill>
                   <a:srgbClr val="000066"/>
                 </a:solidFill>
@@ -4427,19 +4391,7 @@
                 <a:ea typeface="Microsoft JhengHei" panose="020B0604030504040204" pitchFamily="34" charset="-120"/>
                 <a:cs typeface="Arial" panose="020B0604020202020204" pitchFamily="34" charset="0"/>
               </a:rPr>
-              <a:t> </a:t>
-            </a:r>
-            <a:r>
-              <a:rPr lang="en-US" sz="4400" b="1" dirty="0">
-                <a:solidFill>
-                  <a:srgbClr val="000066"/>
-                </a:solidFill>
-                <a:effectLst/>
-                <a:latin typeface="Microsoft JhengHei" panose="020B0604030504040204" pitchFamily="34" charset="-120"/>
-                <a:ea typeface="Microsoft JhengHei" panose="020B0604030504040204" pitchFamily="34" charset="-120"/>
-                <a:cs typeface="Arial" panose="020B0604020202020204" pitchFamily="34" charset="0"/>
-              </a:rPr>
-              <a:t>)</a:t>
+              <a:t> )</a:t>
             </a:r>
             <a:endParaRPr lang="vi-VN" sz="4400" b="1" dirty="0">
               <a:solidFill>
@@ -4942,7 +4894,7 @@
               <a:t>( </a:t>
             </a:r>
             <a:r>
-              <a:rPr lang="zh-CN" altLang="en-US" sz="4400" b="1" dirty="0" smtClean="0">
+              <a:rPr lang="zh-CN" altLang="en-US" sz="4400" b="1" dirty="0">
                 <a:solidFill>
                   <a:srgbClr val="000066"/>
                 </a:solidFill>
@@ -4951,10 +4903,10 @@
                 <a:ea typeface="Microsoft JhengHei" panose="020B0604030504040204" pitchFamily="34" charset="-120"/>
                 <a:cs typeface="Arial" panose="020B0604020202020204" pitchFamily="34" charset="0"/>
               </a:rPr>
-              <a:t>正</a:t>
-            </a:r>
-            <a:r>
-              <a:rPr lang="en-US" sz="4400" b="1" dirty="0" smtClean="0">
+              <a:t>正歌</a:t>
+            </a:r>
+            <a:r>
+              <a:rPr lang="en-US" sz="4400" b="1" dirty="0">
                 <a:solidFill>
                   <a:srgbClr val="000066"/>
                 </a:solidFill>
@@ -4963,19 +4915,7 @@
                 <a:ea typeface="Microsoft JhengHei" panose="020B0604030504040204" pitchFamily="34" charset="-120"/>
                 <a:cs typeface="Arial" panose="020B0604020202020204" pitchFamily="34" charset="0"/>
               </a:rPr>
-              <a:t> </a:t>
-            </a:r>
-            <a:r>
-              <a:rPr lang="en-US" sz="4400" b="1" dirty="0">
-                <a:solidFill>
-                  <a:srgbClr val="000066"/>
-                </a:solidFill>
-                <a:effectLst/>
-                <a:latin typeface="Microsoft JhengHei" panose="020B0604030504040204" pitchFamily="34" charset="-120"/>
-                <a:ea typeface="Microsoft JhengHei" panose="020B0604030504040204" pitchFamily="34" charset="-120"/>
-                <a:cs typeface="Arial" panose="020B0604020202020204" pitchFamily="34" charset="0"/>
-              </a:rPr>
-              <a:t>)</a:t>
+              <a:t> )</a:t>
             </a:r>
             <a:endParaRPr lang="vi-VN" sz="4400" b="1" dirty="0">
               <a:solidFill>
@@ -5478,7 +5418,7 @@
               <a:t>( </a:t>
             </a:r>
             <a:r>
-              <a:rPr lang="zh-CN" altLang="en-US" sz="4400" b="1" dirty="0" smtClean="0">
+              <a:rPr lang="zh-CN" altLang="en-US" sz="4400" b="1" dirty="0">
                 <a:solidFill>
                   <a:srgbClr val="000066"/>
                 </a:solidFill>
@@ -5487,10 +5427,10 @@
                 <a:ea typeface="Microsoft JhengHei" panose="020B0604030504040204" pitchFamily="34" charset="-120"/>
                 <a:cs typeface="Arial" panose="020B0604020202020204" pitchFamily="34" charset="0"/>
               </a:rPr>
-              <a:t>正</a:t>
-            </a:r>
-            <a:r>
-              <a:rPr lang="en-US" sz="4400" b="1" dirty="0" smtClean="0">
+              <a:t>正歌</a:t>
+            </a:r>
+            <a:r>
+              <a:rPr lang="en-US" sz="4400" b="1" dirty="0">
                 <a:solidFill>
                   <a:srgbClr val="000066"/>
                 </a:solidFill>
@@ -5499,19 +5439,7 @@
                 <a:ea typeface="Microsoft JhengHei" panose="020B0604030504040204" pitchFamily="34" charset="-120"/>
                 <a:cs typeface="Arial" panose="020B0604020202020204" pitchFamily="34" charset="0"/>
               </a:rPr>
-              <a:t> </a:t>
-            </a:r>
-            <a:r>
-              <a:rPr lang="en-US" sz="4400" b="1" dirty="0">
-                <a:solidFill>
-                  <a:srgbClr val="000066"/>
-                </a:solidFill>
-                <a:effectLst/>
-                <a:latin typeface="Microsoft JhengHei" panose="020B0604030504040204" pitchFamily="34" charset="-120"/>
-                <a:ea typeface="Microsoft JhengHei" panose="020B0604030504040204" pitchFamily="34" charset="-120"/>
-                <a:cs typeface="Arial" panose="020B0604020202020204" pitchFamily="34" charset="0"/>
-              </a:rPr>
-              <a:t>)</a:t>
+              <a:t> )</a:t>
             </a:r>
             <a:endParaRPr lang="vi-VN" sz="4400" b="1" dirty="0">
               <a:solidFill>
@@ -5581,24 +5509,14 @@
               <a:buNone/>
             </a:pPr>
             <a:r>
-              <a:rPr lang="zh-TW" altLang="en-US" sz="6400" b="1" spc="-1" dirty="0" smtClean="0">
+              <a:rPr lang="zh-TW" altLang="en-US" sz="6400" b="1" spc="-1" dirty="0">
                 <a:solidFill>
                   <a:srgbClr val="000066"/>
                 </a:solidFill>
                 <a:latin typeface="微軟正黑體"/>
                 <a:ea typeface="微軟正黑體"/>
               </a:rPr>
-              <a:t>讓</a:t>
-            </a:r>
-            <a:r>
-              <a:rPr lang="zh-TW" altLang="en-US" sz="6400" b="1" spc="-1" dirty="0">
-                <a:solidFill>
-                  <a:srgbClr val="000066"/>
-                </a:solidFill>
-                <a:latin typeface="微軟正黑體"/>
-                <a:ea typeface="微軟正黑體"/>
-              </a:rPr>
-              <a:t>愛天天住你家</a:t>
+              <a:t>讓愛天天住你家</a:t>
             </a:r>
             <a:endParaRPr lang="en-US" altLang="zh-CN" sz="6400" b="1" spc="-1" dirty="0">
               <a:solidFill>
@@ -6006,7 +5924,7 @@
               <a:t>( </a:t>
             </a:r>
             <a:r>
-              <a:rPr lang="zh-CN" altLang="en-US" sz="4400" b="1" dirty="0" smtClean="0">
+              <a:rPr lang="zh-CN" altLang="en-US" sz="4400" b="1" dirty="0">
                 <a:solidFill>
                   <a:srgbClr val="000066"/>
                 </a:solidFill>
@@ -6015,10 +5933,10 @@
                 <a:ea typeface="Microsoft JhengHei" panose="020B0604030504040204" pitchFamily="34" charset="-120"/>
                 <a:cs typeface="Arial" panose="020B0604020202020204" pitchFamily="34" charset="0"/>
               </a:rPr>
-              <a:t>副</a:t>
-            </a:r>
-            <a:r>
-              <a:rPr lang="en-US" sz="4400" b="1" dirty="0" smtClean="0">
+              <a:t>副歌</a:t>
+            </a:r>
+            <a:r>
+              <a:rPr lang="en-US" sz="4400" b="1" dirty="0">
                 <a:solidFill>
                   <a:srgbClr val="000066"/>
                 </a:solidFill>
@@ -6027,19 +5945,7 @@
                 <a:ea typeface="Microsoft JhengHei" panose="020B0604030504040204" pitchFamily="34" charset="-120"/>
                 <a:cs typeface="Arial" panose="020B0604020202020204" pitchFamily="34" charset="0"/>
               </a:rPr>
-              <a:t> </a:t>
-            </a:r>
-            <a:r>
-              <a:rPr lang="en-US" sz="4400" b="1" dirty="0">
-                <a:solidFill>
-                  <a:srgbClr val="000066"/>
-                </a:solidFill>
-                <a:effectLst/>
-                <a:latin typeface="Microsoft JhengHei" panose="020B0604030504040204" pitchFamily="34" charset="-120"/>
-                <a:ea typeface="Microsoft JhengHei" panose="020B0604030504040204" pitchFamily="34" charset="-120"/>
-                <a:cs typeface="Arial" panose="020B0604020202020204" pitchFamily="34" charset="0"/>
-              </a:rPr>
-              <a:t>)</a:t>
+              <a:t> )</a:t>
             </a:r>
             <a:endParaRPr lang="vi-VN" sz="4400" b="1" dirty="0">
               <a:solidFill>
@@ -6524,7 +6430,7 @@
               <a:t>( </a:t>
             </a:r>
             <a:r>
-              <a:rPr lang="zh-CN" altLang="en-US" sz="4400" b="1" dirty="0" smtClean="0">
+              <a:rPr lang="zh-CN" altLang="en-US" sz="4400" b="1" dirty="0">
                 <a:solidFill>
                   <a:srgbClr val="000066"/>
                 </a:solidFill>
@@ -6533,10 +6439,10 @@
                 <a:ea typeface="Microsoft JhengHei" panose="020B0604030504040204" pitchFamily="34" charset="-120"/>
                 <a:cs typeface="Arial" panose="020B0604020202020204" pitchFamily="34" charset="0"/>
               </a:rPr>
-              <a:t>副</a:t>
-            </a:r>
-            <a:r>
-              <a:rPr lang="en-US" sz="4400" b="1" dirty="0" smtClean="0">
+              <a:t>副歌</a:t>
+            </a:r>
+            <a:r>
+              <a:rPr lang="en-US" sz="4400" b="1" dirty="0">
                 <a:solidFill>
                   <a:srgbClr val="000066"/>
                 </a:solidFill>
@@ -6545,19 +6451,7 @@
                 <a:ea typeface="Microsoft JhengHei" panose="020B0604030504040204" pitchFamily="34" charset="-120"/>
                 <a:cs typeface="Arial" panose="020B0604020202020204" pitchFamily="34" charset="0"/>
               </a:rPr>
-              <a:t> </a:t>
-            </a:r>
-            <a:r>
-              <a:rPr lang="en-US" sz="4400" b="1" dirty="0">
-                <a:solidFill>
-                  <a:srgbClr val="000066"/>
-                </a:solidFill>
-                <a:effectLst/>
-                <a:latin typeface="Microsoft JhengHei" panose="020B0604030504040204" pitchFamily="34" charset="-120"/>
-                <a:ea typeface="Microsoft JhengHei" panose="020B0604030504040204" pitchFamily="34" charset="-120"/>
-                <a:cs typeface="Arial" panose="020B0604020202020204" pitchFamily="34" charset="0"/>
-              </a:rPr>
-              <a:t>)</a:t>
+              <a:t> )</a:t>
             </a:r>
             <a:endParaRPr lang="vi-VN" sz="4400" b="1" dirty="0">
               <a:solidFill>
@@ -7006,7 +6900,7 @@
               <a:t>( </a:t>
             </a:r>
             <a:r>
-              <a:rPr lang="zh-CN" altLang="en-US" sz="4400" b="1" dirty="0" smtClean="0">
+              <a:rPr lang="zh-CN" altLang="en-US" sz="4400" b="1" dirty="0">
                 <a:solidFill>
                   <a:srgbClr val="000066"/>
                 </a:solidFill>
@@ -7015,10 +6909,10 @@
                 <a:ea typeface="Microsoft JhengHei" panose="020B0604030504040204" pitchFamily="34" charset="-120"/>
                 <a:cs typeface="Arial" panose="020B0604020202020204" pitchFamily="34" charset="0"/>
               </a:rPr>
-              <a:t>副</a:t>
-            </a:r>
-            <a:r>
-              <a:rPr lang="en-US" sz="4400" b="1" dirty="0" smtClean="0">
+              <a:t>副歌</a:t>
+            </a:r>
+            <a:r>
+              <a:rPr lang="en-US" sz="4400" b="1" dirty="0">
                 <a:solidFill>
                   <a:srgbClr val="000066"/>
                 </a:solidFill>
@@ -7027,19 +6921,7 @@
                 <a:ea typeface="Microsoft JhengHei" panose="020B0604030504040204" pitchFamily="34" charset="-120"/>
                 <a:cs typeface="Arial" panose="020B0604020202020204" pitchFamily="34" charset="0"/>
               </a:rPr>
-              <a:t> </a:t>
-            </a:r>
-            <a:r>
-              <a:rPr lang="en-US" sz="4400" b="1" dirty="0">
-                <a:solidFill>
-                  <a:srgbClr val="000066"/>
-                </a:solidFill>
-                <a:effectLst/>
-                <a:latin typeface="Microsoft JhengHei" panose="020B0604030504040204" pitchFamily="34" charset="-120"/>
-                <a:ea typeface="Microsoft JhengHei" panose="020B0604030504040204" pitchFamily="34" charset="-120"/>
-                <a:cs typeface="Arial" panose="020B0604020202020204" pitchFamily="34" charset="0"/>
-              </a:rPr>
-              <a:t>)</a:t>
+              <a:t> )</a:t>
             </a:r>
             <a:endParaRPr lang="vi-VN" sz="4400" b="1" dirty="0">
               <a:solidFill>
@@ -7470,7 +7352,7 @@
               <a:t>( </a:t>
             </a:r>
             <a:r>
-              <a:rPr lang="zh-CN" altLang="en-US" sz="4400" b="1" dirty="0" smtClean="0">
+              <a:rPr lang="zh-CN" altLang="en-US" sz="4400" b="1" dirty="0">
                 <a:solidFill>
                   <a:srgbClr val="000066"/>
                 </a:solidFill>
@@ -7479,10 +7361,10 @@
                 <a:ea typeface="Microsoft JhengHei" panose="020B0604030504040204" pitchFamily="34" charset="-120"/>
                 <a:cs typeface="Arial" panose="020B0604020202020204" pitchFamily="34" charset="0"/>
               </a:rPr>
-              <a:t>副</a:t>
-            </a:r>
-            <a:r>
-              <a:rPr lang="en-US" sz="4400" b="1" dirty="0" smtClean="0">
+              <a:t>副歌</a:t>
+            </a:r>
+            <a:r>
+              <a:rPr lang="en-US" sz="4400" b="1" dirty="0">
                 <a:solidFill>
                   <a:srgbClr val="000066"/>
                 </a:solidFill>
@@ -7491,19 +7373,7 @@
                 <a:ea typeface="Microsoft JhengHei" panose="020B0604030504040204" pitchFamily="34" charset="-120"/>
                 <a:cs typeface="Arial" panose="020B0604020202020204" pitchFamily="34" charset="0"/>
               </a:rPr>
-              <a:t> </a:t>
-            </a:r>
-            <a:r>
-              <a:rPr lang="en-US" sz="4400" b="1" dirty="0">
-                <a:solidFill>
-                  <a:srgbClr val="000066"/>
-                </a:solidFill>
-                <a:effectLst/>
-                <a:latin typeface="Microsoft JhengHei" panose="020B0604030504040204" pitchFamily="34" charset="-120"/>
-                <a:ea typeface="Microsoft JhengHei" panose="020B0604030504040204" pitchFamily="34" charset="-120"/>
-                <a:cs typeface="Arial" panose="020B0604020202020204" pitchFamily="34" charset="0"/>
-              </a:rPr>
-              <a:t>)</a:t>
+              <a:t> )</a:t>
             </a:r>
             <a:endParaRPr lang="vi-VN" sz="4400" b="1" dirty="0">
               <a:solidFill>

--- a/中越詩歌/愛我們的家_Yêu gia đình mình_v2.pptx
+++ b/中越詩歌/愛我們的家_Yêu gia đình mình_v2.pptx
@@ -301,7 +301,7 @@
           <a:p>
             <a:fld id="{E803595F-A6B1-4F82-84CF-276E9D55F6F8}" type="datetimeFigureOut">
               <a:rPr lang="vi-VN" smtClean="0"/>
-              <a:t>26/01/2025</a:t>
+              <a:t>30/09/2025</a:t>
             </a:fld>
             <a:endParaRPr lang="vi-VN"/>
           </a:p>
@@ -471,7 +471,7 @@
           <a:p>
             <a:fld id="{E803595F-A6B1-4F82-84CF-276E9D55F6F8}" type="datetimeFigureOut">
               <a:rPr lang="vi-VN" smtClean="0"/>
-              <a:t>26/01/2025</a:t>
+              <a:t>30/09/2025</a:t>
             </a:fld>
             <a:endParaRPr lang="vi-VN"/>
           </a:p>
@@ -651,7 +651,7 @@
           <a:p>
             <a:fld id="{E803595F-A6B1-4F82-84CF-276E9D55F6F8}" type="datetimeFigureOut">
               <a:rPr lang="vi-VN" smtClean="0"/>
-              <a:t>26/01/2025</a:t>
+              <a:t>30/09/2025</a:t>
             </a:fld>
             <a:endParaRPr lang="vi-VN"/>
           </a:p>
@@ -821,7 +821,7 @@
           <a:p>
             <a:fld id="{E803595F-A6B1-4F82-84CF-276E9D55F6F8}" type="datetimeFigureOut">
               <a:rPr lang="vi-VN" smtClean="0"/>
-              <a:t>26/01/2025</a:t>
+              <a:t>30/09/2025</a:t>
             </a:fld>
             <a:endParaRPr lang="vi-VN"/>
           </a:p>
@@ -1067,7 +1067,7 @@
           <a:p>
             <a:fld id="{E803595F-A6B1-4F82-84CF-276E9D55F6F8}" type="datetimeFigureOut">
               <a:rPr lang="vi-VN" smtClean="0"/>
-              <a:t>26/01/2025</a:t>
+              <a:t>30/09/2025</a:t>
             </a:fld>
             <a:endParaRPr lang="vi-VN"/>
           </a:p>
@@ -1355,7 +1355,7 @@
           <a:p>
             <a:fld id="{E803595F-A6B1-4F82-84CF-276E9D55F6F8}" type="datetimeFigureOut">
               <a:rPr lang="vi-VN" smtClean="0"/>
-              <a:t>26/01/2025</a:t>
+              <a:t>30/09/2025</a:t>
             </a:fld>
             <a:endParaRPr lang="vi-VN"/>
           </a:p>
@@ -1777,7 +1777,7 @@
           <a:p>
             <a:fld id="{E803595F-A6B1-4F82-84CF-276E9D55F6F8}" type="datetimeFigureOut">
               <a:rPr lang="vi-VN" smtClean="0"/>
-              <a:t>26/01/2025</a:t>
+              <a:t>30/09/2025</a:t>
             </a:fld>
             <a:endParaRPr lang="vi-VN"/>
           </a:p>
@@ -1895,7 +1895,7 @@
           <a:p>
             <a:fld id="{E803595F-A6B1-4F82-84CF-276E9D55F6F8}" type="datetimeFigureOut">
               <a:rPr lang="vi-VN" smtClean="0"/>
-              <a:t>26/01/2025</a:t>
+              <a:t>30/09/2025</a:t>
             </a:fld>
             <a:endParaRPr lang="vi-VN"/>
           </a:p>
@@ -1990,7 +1990,7 @@
           <a:p>
             <a:fld id="{E803595F-A6B1-4F82-84CF-276E9D55F6F8}" type="datetimeFigureOut">
               <a:rPr lang="vi-VN" smtClean="0"/>
-              <a:t>26/01/2025</a:t>
+              <a:t>30/09/2025</a:t>
             </a:fld>
             <a:endParaRPr lang="vi-VN"/>
           </a:p>
@@ -2267,7 +2267,7 @@
           <a:p>
             <a:fld id="{E803595F-A6B1-4F82-84CF-276E9D55F6F8}" type="datetimeFigureOut">
               <a:rPr lang="vi-VN" smtClean="0"/>
-              <a:t>26/01/2025</a:t>
+              <a:t>30/09/2025</a:t>
             </a:fld>
             <a:endParaRPr lang="vi-VN"/>
           </a:p>
@@ -2524,7 +2524,7 @@
           <a:p>
             <a:fld id="{E803595F-A6B1-4F82-84CF-276E9D55F6F8}" type="datetimeFigureOut">
               <a:rPr lang="vi-VN" smtClean="0"/>
-              <a:t>26/01/2025</a:t>
+              <a:t>30/09/2025</a:t>
             </a:fld>
             <a:endParaRPr lang="vi-VN"/>
           </a:p>
@@ -2740,7 +2740,7 @@
           <a:p>
             <a:fld id="{E803595F-A6B1-4F82-84CF-276E9D55F6F8}" type="datetimeFigureOut">
               <a:rPr lang="vi-VN" smtClean="0"/>
-              <a:t>26/01/2025</a:t>
+              <a:t>30/09/2025</a:t>
             </a:fld>
             <a:endParaRPr lang="vi-VN"/>
           </a:p>
@@ -3577,218 +3577,14 @@
               <a:buNone/>
             </a:pPr>
             <a:r>
-              <a:rPr lang="en-US" sz="3600" b="1" dirty="0" err="1">
-                <a:solidFill>
-                  <a:srgbClr val="660033"/>
-                </a:solidFill>
-                <a:ea typeface="微軟正黑體" pitchFamily="34" charset="-120"/>
-              </a:rPr>
-              <a:t>Nếu</a:t>
-            </a:r>
-            <a:r>
-              <a:rPr lang="en-US" sz="3600" b="1" dirty="0">
-                <a:solidFill>
-                  <a:srgbClr val="660033"/>
-                </a:solidFill>
-                <a:ea typeface="微軟正黑體" pitchFamily="34" charset="-120"/>
-              </a:rPr>
-              <a:t> </a:t>
-            </a:r>
-            <a:r>
-              <a:rPr lang="en-US" sz="3600" b="1" dirty="0" err="1">
-                <a:solidFill>
-                  <a:srgbClr val="660033"/>
-                </a:solidFill>
-                <a:ea typeface="微軟正黑體" pitchFamily="34" charset="-120"/>
-              </a:rPr>
-              <a:t>mỗi</a:t>
-            </a:r>
-            <a:r>
-              <a:rPr lang="en-US" sz="3600" b="1" dirty="0">
-                <a:solidFill>
-                  <a:srgbClr val="660033"/>
-                </a:solidFill>
-                <a:ea typeface="微軟正黑體" pitchFamily="34" charset="-120"/>
-              </a:rPr>
-              <a:t> </a:t>
-            </a:r>
-            <a:r>
-              <a:rPr lang="en-US" sz="3600" b="1" dirty="0" err="1">
-                <a:solidFill>
-                  <a:srgbClr val="660033"/>
-                </a:solidFill>
-                <a:ea typeface="微軟正黑體" pitchFamily="34" charset="-120"/>
-              </a:rPr>
-              <a:t>người</a:t>
-            </a:r>
-            <a:r>
-              <a:rPr lang="en-US" sz="3600" b="1" dirty="0">
-                <a:solidFill>
-                  <a:srgbClr val="660033"/>
-                </a:solidFill>
-                <a:ea typeface="微軟正黑體" pitchFamily="34" charset="-120"/>
-              </a:rPr>
-              <a:t> </a:t>
-            </a:r>
-            <a:r>
-              <a:rPr lang="en-US" sz="3600" b="1" dirty="0" err="1">
-                <a:solidFill>
-                  <a:srgbClr val="660033"/>
-                </a:solidFill>
-                <a:ea typeface="微軟正黑體" pitchFamily="34" charset="-120"/>
-              </a:rPr>
-              <a:t>yêu</a:t>
-            </a:r>
-            <a:r>
-              <a:rPr lang="en-US" sz="3600" b="1" dirty="0">
-                <a:solidFill>
-                  <a:srgbClr val="660033"/>
-                </a:solidFill>
-                <a:ea typeface="微軟正黑體" pitchFamily="34" charset="-120"/>
-              </a:rPr>
-              <a:t> </a:t>
-            </a:r>
-            <a:r>
-              <a:rPr lang="en-US" sz="3600" b="1" dirty="0" err="1">
-                <a:solidFill>
-                  <a:srgbClr val="660033"/>
-                </a:solidFill>
-                <a:ea typeface="微軟正黑體" pitchFamily="34" charset="-120"/>
-              </a:rPr>
-              <a:t>thương</a:t>
-            </a:r>
-            <a:r>
-              <a:rPr lang="en-US" sz="3600" b="1" dirty="0">
-                <a:solidFill>
-                  <a:srgbClr val="660033"/>
-                </a:solidFill>
-                <a:ea typeface="微軟正黑體" pitchFamily="34" charset="-120"/>
-              </a:rPr>
-              <a:t> </a:t>
-            </a:r>
-            <a:r>
-              <a:rPr lang="en-US" sz="3600" b="1" dirty="0" err="1">
-                <a:solidFill>
-                  <a:srgbClr val="660033"/>
-                </a:solidFill>
-                <a:ea typeface="微軟正黑體" pitchFamily="34" charset="-120"/>
-              </a:rPr>
-              <a:t>lẫn</a:t>
-            </a:r>
-            <a:r>
-              <a:rPr lang="en-US" sz="3600" b="1" dirty="0">
-                <a:solidFill>
-                  <a:srgbClr val="660033"/>
-                </a:solidFill>
-                <a:ea typeface="微軟正黑體" pitchFamily="34" charset="-120"/>
-              </a:rPr>
-              <a:t> </a:t>
-            </a:r>
-            <a:r>
-              <a:rPr lang="en-US" sz="3600" b="1" dirty="0" err="1">
-                <a:solidFill>
-                  <a:srgbClr val="660033"/>
-                </a:solidFill>
-                <a:ea typeface="微軟正黑體" pitchFamily="34" charset="-120"/>
-              </a:rPr>
-              <a:t>nhau</a:t>
-            </a:r>
-            <a:r>
-              <a:rPr lang="en-US" sz="3600" b="1" dirty="0">
-                <a:solidFill>
-                  <a:srgbClr val="660033"/>
-                </a:solidFill>
-                <a:ea typeface="微軟正黑體" pitchFamily="34" charset="-120"/>
-              </a:rPr>
-              <a:t>, </a:t>
-            </a:r>
-            <a:r>
-              <a:rPr lang="en-US" sz="3600" b="1" dirty="0" err="1">
-                <a:solidFill>
-                  <a:srgbClr val="660033"/>
-                </a:solidFill>
-                <a:ea typeface="微軟正黑體" pitchFamily="34" charset="-120"/>
-              </a:rPr>
-              <a:t>gia</a:t>
-            </a:r>
-            <a:r>
-              <a:rPr lang="en-US" sz="3600" b="1" dirty="0">
-                <a:solidFill>
-                  <a:srgbClr val="660033"/>
-                </a:solidFill>
-                <a:ea typeface="微軟正黑體" pitchFamily="34" charset="-120"/>
-              </a:rPr>
-              <a:t> </a:t>
-            </a:r>
-            <a:r>
-              <a:rPr lang="en-US" sz="3600" b="1" dirty="0" err="1">
-                <a:solidFill>
-                  <a:srgbClr val="660033"/>
-                </a:solidFill>
-                <a:ea typeface="微軟正黑體" pitchFamily="34" charset="-120"/>
-              </a:rPr>
-              <a:t>đình</a:t>
-            </a:r>
-            <a:r>
-              <a:rPr lang="en-US" sz="3600" b="1" dirty="0">
-                <a:solidFill>
-                  <a:srgbClr val="660033"/>
-                </a:solidFill>
-                <a:ea typeface="微軟正黑體" pitchFamily="34" charset="-120"/>
-              </a:rPr>
-              <a:t> </a:t>
-            </a:r>
-            <a:r>
-              <a:rPr lang="en-US" sz="3600" b="1" dirty="0" err="1">
-                <a:solidFill>
-                  <a:srgbClr val="660033"/>
-                </a:solidFill>
-                <a:ea typeface="微軟正黑體" pitchFamily="34" charset="-120"/>
-              </a:rPr>
-              <a:t>sẽ</a:t>
-            </a:r>
-            <a:r>
-              <a:rPr lang="en-US" sz="3600" b="1" dirty="0">
-                <a:solidFill>
-                  <a:srgbClr val="660033"/>
-                </a:solidFill>
-                <a:ea typeface="微軟正黑體" pitchFamily="34" charset="-120"/>
-              </a:rPr>
-              <a:t> </a:t>
-            </a:r>
-            <a:r>
-              <a:rPr lang="en-US" sz="3600" b="1" dirty="0" err="1">
-                <a:solidFill>
-                  <a:srgbClr val="660033"/>
-                </a:solidFill>
-                <a:ea typeface="微軟正黑體" pitchFamily="34" charset="-120"/>
-              </a:rPr>
-              <a:t>rực</a:t>
-            </a:r>
-            <a:r>
-              <a:rPr lang="en-US" sz="3600" b="1" dirty="0">
-                <a:solidFill>
-                  <a:srgbClr val="660033"/>
-                </a:solidFill>
-                <a:ea typeface="微軟正黑體" pitchFamily="34" charset="-120"/>
-              </a:rPr>
-              <a:t> </a:t>
-            </a:r>
-            <a:r>
-              <a:rPr lang="en-US" sz="3600" b="1" dirty="0" err="1">
-                <a:solidFill>
-                  <a:srgbClr val="660033"/>
-                </a:solidFill>
-                <a:ea typeface="微軟正黑體" pitchFamily="34" charset="-120"/>
-              </a:rPr>
-              <a:t>rỡ</a:t>
-            </a:r>
-            <a:endParaRPr lang="vi-VN" sz="3600" b="1" dirty="0">
-              <a:solidFill>
-                <a:srgbClr val="660033"/>
-              </a:solidFill>
-              <a:ea typeface="微軟正黑體" pitchFamily="34" charset="-120"/>
-            </a:endParaRPr>
+              <a:rPr lang="vi-VN" sz="3600" b="1" dirty="0">
+                <a:solidFill>
+                  <a:srgbClr val="660033"/>
+                </a:solidFill>
+                <a:ea typeface="微軟正黑體" pitchFamily="34" charset="-120"/>
+              </a:rPr>
+              <a:t>Mỗi người yêu thương, gia đình sẽ rạng ngời</a:t>
+            </a:r>
           </a:p>
         </p:txBody>
       </p:sp>
@@ -4101,236 +3897,14 @@
               <a:buNone/>
             </a:pPr>
             <a:r>
-              <a:rPr lang="en-US" sz="3600" b="1" dirty="0" err="1">
-                <a:solidFill>
-                  <a:srgbClr val="660033"/>
-                </a:solidFill>
-                <a:ea typeface="微軟正黑體" pitchFamily="34" charset="-120"/>
-              </a:rPr>
-              <a:t>Nếu</a:t>
-            </a:r>
-            <a:r>
-              <a:rPr lang="en-US" sz="3600" b="1" dirty="0">
-                <a:solidFill>
-                  <a:srgbClr val="660033"/>
-                </a:solidFill>
-                <a:ea typeface="微軟正黑體" pitchFamily="34" charset="-120"/>
-              </a:rPr>
-              <a:t> </a:t>
-            </a:r>
-            <a:r>
-              <a:rPr lang="en-US" sz="3600" b="1" dirty="0" err="1">
-                <a:solidFill>
-                  <a:srgbClr val="660033"/>
-                </a:solidFill>
-                <a:ea typeface="微軟正黑體" pitchFamily="34" charset="-120"/>
-              </a:rPr>
-              <a:t>mỗi</a:t>
-            </a:r>
-            <a:r>
-              <a:rPr lang="en-US" sz="3600" b="1" dirty="0">
-                <a:solidFill>
-                  <a:srgbClr val="660033"/>
-                </a:solidFill>
-                <a:ea typeface="微軟正黑體" pitchFamily="34" charset="-120"/>
-              </a:rPr>
-              <a:t> </a:t>
-            </a:r>
-            <a:r>
-              <a:rPr lang="en-US" sz="3600" b="1" dirty="0" err="1">
-                <a:solidFill>
-                  <a:srgbClr val="660033"/>
-                </a:solidFill>
-                <a:ea typeface="微軟正黑體" pitchFamily="34" charset="-120"/>
-              </a:rPr>
-              <a:t>người</a:t>
-            </a:r>
-            <a:r>
-              <a:rPr lang="en-US" sz="3600" b="1" dirty="0">
-                <a:solidFill>
-                  <a:srgbClr val="660033"/>
-                </a:solidFill>
-                <a:ea typeface="微軟正黑體" pitchFamily="34" charset="-120"/>
-              </a:rPr>
-              <a:t> </a:t>
-            </a:r>
-            <a:r>
-              <a:rPr lang="en-US" sz="3600" b="1" dirty="0" err="1">
-                <a:solidFill>
-                  <a:srgbClr val="660033"/>
-                </a:solidFill>
-                <a:ea typeface="微軟正黑體" pitchFamily="34" charset="-120"/>
-              </a:rPr>
-              <a:t>hy</a:t>
-            </a:r>
-            <a:r>
-              <a:rPr lang="en-US" sz="3600" b="1" dirty="0">
-                <a:solidFill>
-                  <a:srgbClr val="660033"/>
-                </a:solidFill>
-                <a:ea typeface="微軟正黑體" pitchFamily="34" charset="-120"/>
-              </a:rPr>
-              <a:t> </a:t>
-            </a:r>
-            <a:r>
-              <a:rPr lang="en-US" sz="3600" b="1" dirty="0" err="1">
-                <a:solidFill>
-                  <a:srgbClr val="660033"/>
-                </a:solidFill>
-                <a:ea typeface="微軟正黑體" pitchFamily="34" charset="-120"/>
-              </a:rPr>
-              <a:t>sinh</a:t>
-            </a:r>
-            <a:r>
-              <a:rPr lang="en-US" sz="3600" b="1" dirty="0">
-                <a:solidFill>
-                  <a:srgbClr val="660033"/>
-                </a:solidFill>
-                <a:ea typeface="微軟正黑體" pitchFamily="34" charset="-120"/>
-              </a:rPr>
-              <a:t> </a:t>
-            </a:r>
-            <a:r>
-              <a:rPr lang="en-US" sz="3600" b="1" dirty="0" err="1">
-                <a:solidFill>
-                  <a:srgbClr val="660033"/>
-                </a:solidFill>
-                <a:ea typeface="微軟正黑體" pitchFamily="34" charset="-120"/>
-              </a:rPr>
-              <a:t>cho</a:t>
-            </a:r>
-            <a:r>
-              <a:rPr lang="en-US" sz="3600" b="1" dirty="0">
-                <a:solidFill>
-                  <a:srgbClr val="660033"/>
-                </a:solidFill>
-                <a:ea typeface="微軟正黑體" pitchFamily="34" charset="-120"/>
-              </a:rPr>
-              <a:t> </a:t>
-            </a:r>
-            <a:r>
-              <a:rPr lang="en-US" sz="3600" b="1" dirty="0" err="1">
-                <a:solidFill>
-                  <a:srgbClr val="660033"/>
-                </a:solidFill>
-                <a:ea typeface="微軟正黑體" pitchFamily="34" charset="-120"/>
-              </a:rPr>
-              <a:t>nhau</a:t>
-            </a:r>
-            <a:r>
-              <a:rPr lang="en-US" sz="3600" b="1" dirty="0">
-                <a:solidFill>
-                  <a:srgbClr val="660033"/>
-                </a:solidFill>
-                <a:ea typeface="微軟正黑體" pitchFamily="34" charset="-120"/>
-              </a:rPr>
-              <a:t>, </a:t>
-            </a:r>
-            <a:r>
-              <a:rPr lang="en-US" sz="3600" b="1" dirty="0" err="1">
-                <a:solidFill>
-                  <a:srgbClr val="660033"/>
-                </a:solidFill>
-                <a:ea typeface="微軟正黑體" pitchFamily="34" charset="-120"/>
-              </a:rPr>
-              <a:t>gia</a:t>
-            </a:r>
-            <a:r>
-              <a:rPr lang="en-US" sz="3600" b="1" dirty="0">
-                <a:solidFill>
-                  <a:srgbClr val="660033"/>
-                </a:solidFill>
-                <a:ea typeface="微軟正黑體" pitchFamily="34" charset="-120"/>
-              </a:rPr>
-              <a:t> </a:t>
-            </a:r>
-            <a:r>
-              <a:rPr lang="en-US" sz="3600" b="1" dirty="0" err="1">
-                <a:solidFill>
-                  <a:srgbClr val="660033"/>
-                </a:solidFill>
-                <a:ea typeface="微軟正黑體" pitchFamily="34" charset="-120"/>
-              </a:rPr>
-              <a:t>đình</a:t>
-            </a:r>
-            <a:r>
-              <a:rPr lang="en-US" sz="3600" b="1" dirty="0">
-                <a:solidFill>
-                  <a:srgbClr val="660033"/>
-                </a:solidFill>
-                <a:ea typeface="微軟正黑體" pitchFamily="34" charset="-120"/>
-              </a:rPr>
-              <a:t> </a:t>
-            </a:r>
-            <a:r>
-              <a:rPr lang="en-US" sz="3600" b="1" dirty="0" err="1">
-                <a:solidFill>
-                  <a:srgbClr val="660033"/>
-                </a:solidFill>
-                <a:ea typeface="微軟正黑體" pitchFamily="34" charset="-120"/>
-              </a:rPr>
-              <a:t>sẽ</a:t>
-            </a:r>
-            <a:r>
-              <a:rPr lang="en-US" sz="3600" b="1" dirty="0">
-                <a:solidFill>
-                  <a:srgbClr val="660033"/>
-                </a:solidFill>
-                <a:ea typeface="微軟正黑體" pitchFamily="34" charset="-120"/>
-              </a:rPr>
-              <a:t> </a:t>
-            </a:r>
-            <a:r>
-              <a:rPr lang="en-US" sz="3600" b="1" dirty="0" err="1">
-                <a:solidFill>
-                  <a:srgbClr val="660033"/>
-                </a:solidFill>
-                <a:ea typeface="微軟正黑體" pitchFamily="34" charset="-120"/>
-              </a:rPr>
-              <a:t>không</a:t>
-            </a:r>
-            <a:r>
-              <a:rPr lang="en-US" sz="3600" b="1" dirty="0">
-                <a:solidFill>
-                  <a:srgbClr val="660033"/>
-                </a:solidFill>
-                <a:ea typeface="微軟正黑體" pitchFamily="34" charset="-120"/>
-              </a:rPr>
-              <a:t> </a:t>
-            </a:r>
-            <a:r>
-              <a:rPr lang="en-US" sz="3600" b="1" dirty="0" err="1">
-                <a:solidFill>
-                  <a:srgbClr val="660033"/>
-                </a:solidFill>
-                <a:ea typeface="微軟正黑體" pitchFamily="34" charset="-120"/>
-              </a:rPr>
-              <a:t>cô</a:t>
-            </a:r>
-            <a:r>
-              <a:rPr lang="en-US" sz="3600" b="1" dirty="0">
-                <a:solidFill>
-                  <a:srgbClr val="660033"/>
-                </a:solidFill>
-                <a:ea typeface="微軟正黑體" pitchFamily="34" charset="-120"/>
-              </a:rPr>
-              <a:t> </a:t>
-            </a:r>
-            <a:r>
-              <a:rPr lang="en-US" sz="3600" b="1" dirty="0" err="1">
-                <a:solidFill>
-                  <a:srgbClr val="660033"/>
-                </a:solidFill>
-                <a:ea typeface="微軟正黑體" pitchFamily="34" charset="-120"/>
-              </a:rPr>
-              <a:t>độc</a:t>
-            </a:r>
-            <a:endParaRPr lang="vi-VN" sz="3600" b="1" dirty="0">
-              <a:solidFill>
-                <a:srgbClr val="660033"/>
-              </a:solidFill>
-              <a:ea typeface="微軟正黑體" pitchFamily="34" charset="-120"/>
-            </a:endParaRPr>
+              <a:rPr lang="vi-VN" sz="3600" b="1" dirty="0">
+                <a:solidFill>
+                  <a:srgbClr val="660033"/>
+                </a:solidFill>
+                <a:ea typeface="微軟正黑體" pitchFamily="34" charset="-120"/>
+              </a:rPr>
+              <a:t>Mỗi người biết chia sẻ, gia đình sẽ không cô đơn</a:t>
+            </a:r>
           </a:p>
         </p:txBody>
       </p:sp>
@@ -4643,218 +4217,14 @@
               <a:buNone/>
             </a:pPr>
             <a:r>
-              <a:rPr lang="en-US" sz="3600" b="1" dirty="0" err="1">
-                <a:solidFill>
-                  <a:srgbClr val="660033"/>
-                </a:solidFill>
-                <a:ea typeface="微軟正黑體" pitchFamily="34" charset="-120"/>
-              </a:rPr>
-              <a:t>Nếu</a:t>
-            </a:r>
-            <a:r>
-              <a:rPr lang="en-US" sz="3600" b="1" dirty="0">
-                <a:solidFill>
-                  <a:srgbClr val="660033"/>
-                </a:solidFill>
-                <a:ea typeface="微軟正黑體" pitchFamily="34" charset="-120"/>
-              </a:rPr>
-              <a:t> </a:t>
-            </a:r>
-            <a:r>
-              <a:rPr lang="en-US" sz="3600" b="1" dirty="0" err="1">
-                <a:solidFill>
-                  <a:srgbClr val="660033"/>
-                </a:solidFill>
-                <a:ea typeface="微軟正黑體" pitchFamily="34" charset="-120"/>
-              </a:rPr>
-              <a:t>mỗi</a:t>
-            </a:r>
-            <a:r>
-              <a:rPr lang="en-US" sz="3600" b="1" dirty="0">
-                <a:solidFill>
-                  <a:srgbClr val="660033"/>
-                </a:solidFill>
-                <a:ea typeface="微軟正黑體" pitchFamily="34" charset="-120"/>
-              </a:rPr>
-              <a:t> </a:t>
-            </a:r>
-            <a:r>
-              <a:rPr lang="en-US" sz="3600" b="1" dirty="0" err="1">
-                <a:solidFill>
-                  <a:srgbClr val="660033"/>
-                </a:solidFill>
-                <a:ea typeface="微軟正黑體" pitchFamily="34" charset="-120"/>
-              </a:rPr>
-              <a:t>người</a:t>
-            </a:r>
-            <a:r>
-              <a:rPr lang="en-US" sz="3600" b="1" dirty="0">
-                <a:solidFill>
-                  <a:srgbClr val="660033"/>
-                </a:solidFill>
-                <a:ea typeface="微軟正黑體" pitchFamily="34" charset="-120"/>
-              </a:rPr>
-              <a:t> </a:t>
-            </a:r>
-            <a:r>
-              <a:rPr lang="en-US" sz="3600" b="1" dirty="0" err="1">
-                <a:solidFill>
-                  <a:srgbClr val="660033"/>
-                </a:solidFill>
-                <a:ea typeface="微軟正黑體" pitchFamily="34" charset="-120"/>
-              </a:rPr>
-              <a:t>trân</a:t>
-            </a:r>
-            <a:r>
-              <a:rPr lang="en-US" sz="3600" b="1" dirty="0">
-                <a:solidFill>
-                  <a:srgbClr val="660033"/>
-                </a:solidFill>
-                <a:ea typeface="微軟正黑體" pitchFamily="34" charset="-120"/>
-              </a:rPr>
-              <a:t> </a:t>
-            </a:r>
-            <a:r>
-              <a:rPr lang="en-US" sz="3600" b="1" dirty="0" err="1">
-                <a:solidFill>
-                  <a:srgbClr val="660033"/>
-                </a:solidFill>
-                <a:ea typeface="微軟正黑體" pitchFamily="34" charset="-120"/>
-              </a:rPr>
-              <a:t>trọng</a:t>
-            </a:r>
-            <a:r>
-              <a:rPr lang="en-US" sz="3600" b="1" dirty="0">
-                <a:solidFill>
-                  <a:srgbClr val="660033"/>
-                </a:solidFill>
-                <a:ea typeface="微軟正黑體" pitchFamily="34" charset="-120"/>
-              </a:rPr>
-              <a:t> </a:t>
-            </a:r>
-            <a:r>
-              <a:rPr lang="en-US" sz="3600" b="1" dirty="0" err="1">
-                <a:solidFill>
-                  <a:srgbClr val="660033"/>
-                </a:solidFill>
-                <a:ea typeface="微軟正黑體" pitchFamily="34" charset="-120"/>
-              </a:rPr>
-              <a:t>lẫn</a:t>
-            </a:r>
-            <a:r>
-              <a:rPr lang="en-US" sz="3600" b="1" dirty="0">
-                <a:solidFill>
-                  <a:srgbClr val="660033"/>
-                </a:solidFill>
-                <a:ea typeface="微軟正黑體" pitchFamily="34" charset="-120"/>
-              </a:rPr>
-              <a:t> </a:t>
-            </a:r>
-            <a:r>
-              <a:rPr lang="en-US" sz="3600" b="1" dirty="0" err="1">
-                <a:solidFill>
-                  <a:srgbClr val="660033"/>
-                </a:solidFill>
-                <a:ea typeface="微軟正黑體" pitchFamily="34" charset="-120"/>
-              </a:rPr>
-              <a:t>nhau</a:t>
-            </a:r>
-            <a:r>
-              <a:rPr lang="en-US" sz="3600" b="1" dirty="0">
-                <a:solidFill>
-                  <a:srgbClr val="660033"/>
-                </a:solidFill>
-                <a:ea typeface="微軟正黑體" pitchFamily="34" charset="-120"/>
-              </a:rPr>
-              <a:t>, </a:t>
-            </a:r>
-            <a:r>
-              <a:rPr lang="en-US" sz="3600" b="1" dirty="0" err="1">
-                <a:solidFill>
-                  <a:srgbClr val="660033"/>
-                </a:solidFill>
-                <a:ea typeface="微軟正黑體" pitchFamily="34" charset="-120"/>
-              </a:rPr>
-              <a:t>gia</a:t>
-            </a:r>
-            <a:r>
-              <a:rPr lang="en-US" sz="3600" b="1" dirty="0">
-                <a:solidFill>
-                  <a:srgbClr val="660033"/>
-                </a:solidFill>
-                <a:ea typeface="微軟正黑體" pitchFamily="34" charset="-120"/>
-              </a:rPr>
-              <a:t> </a:t>
-            </a:r>
-            <a:r>
-              <a:rPr lang="en-US" sz="3600" b="1" dirty="0" err="1">
-                <a:solidFill>
-                  <a:srgbClr val="660033"/>
-                </a:solidFill>
-                <a:ea typeface="微軟正黑體" pitchFamily="34" charset="-120"/>
-              </a:rPr>
-              <a:t>đình</a:t>
-            </a:r>
-            <a:r>
-              <a:rPr lang="en-US" sz="3600" b="1" dirty="0">
-                <a:solidFill>
-                  <a:srgbClr val="660033"/>
-                </a:solidFill>
-                <a:ea typeface="微軟正黑體" pitchFamily="34" charset="-120"/>
-              </a:rPr>
-              <a:t> </a:t>
-            </a:r>
-            <a:r>
-              <a:rPr lang="en-US" sz="3600" b="1" dirty="0" err="1">
-                <a:solidFill>
-                  <a:srgbClr val="660033"/>
-                </a:solidFill>
-                <a:ea typeface="微軟正黑體" pitchFamily="34" charset="-120"/>
-              </a:rPr>
-              <a:t>sẽ</a:t>
-            </a:r>
-            <a:r>
-              <a:rPr lang="en-US" sz="3600" b="1" dirty="0">
-                <a:solidFill>
-                  <a:srgbClr val="660033"/>
-                </a:solidFill>
-                <a:ea typeface="微軟正黑體" pitchFamily="34" charset="-120"/>
-              </a:rPr>
-              <a:t> </a:t>
-            </a:r>
-            <a:r>
-              <a:rPr lang="en-US" sz="3600" b="1" dirty="0" err="1">
-                <a:solidFill>
-                  <a:srgbClr val="660033"/>
-                </a:solidFill>
-                <a:ea typeface="微軟正黑體" pitchFamily="34" charset="-120"/>
-              </a:rPr>
-              <a:t>ngọt</a:t>
-            </a:r>
-            <a:r>
-              <a:rPr lang="en-US" sz="3600" b="1" dirty="0">
-                <a:solidFill>
-                  <a:srgbClr val="660033"/>
-                </a:solidFill>
-                <a:ea typeface="微軟正黑體" pitchFamily="34" charset="-120"/>
-              </a:rPr>
-              <a:t> </a:t>
-            </a:r>
-            <a:r>
-              <a:rPr lang="en-US" sz="3600" b="1" dirty="0" err="1">
-                <a:solidFill>
-                  <a:srgbClr val="660033"/>
-                </a:solidFill>
-                <a:ea typeface="微軟正黑體" pitchFamily="34" charset="-120"/>
-              </a:rPr>
-              <a:t>ngào</a:t>
-            </a:r>
-            <a:endParaRPr lang="vi-VN" sz="3600" b="1" dirty="0">
-              <a:solidFill>
-                <a:srgbClr val="660033"/>
-              </a:solidFill>
-              <a:ea typeface="微軟正黑體" pitchFamily="34" charset="-120"/>
-            </a:endParaRPr>
+              <a:rPr lang="vi-VN" sz="3600" b="1" dirty="0">
+                <a:solidFill>
+                  <a:srgbClr val="660033"/>
+                </a:solidFill>
+                <a:ea typeface="微軟正黑體" pitchFamily="34" charset="-120"/>
+              </a:rPr>
+              <a:t>Mỗi người biết trân trọng, gia đình sẽ ngọt ngào</a:t>
+            </a:r>
           </a:p>
         </p:txBody>
       </p:sp>
@@ -5167,218 +4537,14 @@
               <a:buNone/>
             </a:pPr>
             <a:r>
-              <a:rPr lang="en-US" sz="3600" b="1" dirty="0" err="1">
-                <a:solidFill>
-                  <a:srgbClr val="660033"/>
-                </a:solidFill>
-                <a:ea typeface="微軟正黑體" pitchFamily="34" charset="-120"/>
-              </a:rPr>
-              <a:t>Nếu</a:t>
-            </a:r>
-            <a:r>
-              <a:rPr lang="en-US" sz="3600" b="1" dirty="0">
-                <a:solidFill>
-                  <a:srgbClr val="660033"/>
-                </a:solidFill>
-                <a:ea typeface="微軟正黑體" pitchFamily="34" charset="-120"/>
-              </a:rPr>
-              <a:t> </a:t>
-            </a:r>
-            <a:r>
-              <a:rPr lang="en-US" sz="3600" b="1" dirty="0" err="1">
-                <a:solidFill>
-                  <a:srgbClr val="660033"/>
-                </a:solidFill>
-                <a:ea typeface="微軟正黑體" pitchFamily="34" charset="-120"/>
-              </a:rPr>
-              <a:t>mỗi</a:t>
-            </a:r>
-            <a:r>
-              <a:rPr lang="en-US" sz="3600" b="1" dirty="0">
-                <a:solidFill>
-                  <a:srgbClr val="660033"/>
-                </a:solidFill>
-                <a:ea typeface="微軟正黑體" pitchFamily="34" charset="-120"/>
-              </a:rPr>
-              <a:t> </a:t>
-            </a:r>
-            <a:r>
-              <a:rPr lang="en-US" sz="3600" b="1" dirty="0" err="1">
-                <a:solidFill>
-                  <a:srgbClr val="660033"/>
-                </a:solidFill>
-                <a:ea typeface="微軟正黑體" pitchFamily="34" charset="-120"/>
-              </a:rPr>
-              <a:t>người</a:t>
-            </a:r>
-            <a:r>
-              <a:rPr lang="en-US" sz="3600" b="1" dirty="0">
-                <a:solidFill>
-                  <a:srgbClr val="660033"/>
-                </a:solidFill>
-                <a:ea typeface="微軟正黑體" pitchFamily="34" charset="-120"/>
-              </a:rPr>
-              <a:t> </a:t>
-            </a:r>
-            <a:r>
-              <a:rPr lang="en-US" sz="3600" b="1" dirty="0" err="1">
-                <a:solidFill>
-                  <a:srgbClr val="660033"/>
-                </a:solidFill>
-                <a:ea typeface="微軟正黑體" pitchFamily="34" charset="-120"/>
-              </a:rPr>
-              <a:t>tha</a:t>
-            </a:r>
-            <a:r>
-              <a:rPr lang="en-US" sz="3600" b="1" dirty="0">
-                <a:solidFill>
-                  <a:srgbClr val="660033"/>
-                </a:solidFill>
-                <a:ea typeface="微軟正黑體" pitchFamily="34" charset="-120"/>
-              </a:rPr>
-              <a:t> </a:t>
-            </a:r>
-            <a:r>
-              <a:rPr lang="en-US" sz="3600" b="1" dirty="0" err="1">
-                <a:solidFill>
-                  <a:srgbClr val="660033"/>
-                </a:solidFill>
-                <a:ea typeface="微軟正黑體" pitchFamily="34" charset="-120"/>
-              </a:rPr>
-              <a:t>thứ</a:t>
-            </a:r>
-            <a:r>
-              <a:rPr lang="en-US" sz="3600" b="1" dirty="0">
-                <a:solidFill>
-                  <a:srgbClr val="660033"/>
-                </a:solidFill>
-                <a:ea typeface="微軟正黑體" pitchFamily="34" charset="-120"/>
-              </a:rPr>
-              <a:t> </a:t>
-            </a:r>
-            <a:r>
-              <a:rPr lang="en-US" sz="3600" b="1" dirty="0" err="1">
-                <a:solidFill>
-                  <a:srgbClr val="660033"/>
-                </a:solidFill>
-                <a:ea typeface="微軟正黑體" pitchFamily="34" charset="-120"/>
-              </a:rPr>
-              <a:t>lẫn</a:t>
-            </a:r>
-            <a:r>
-              <a:rPr lang="en-US" sz="3600" b="1" dirty="0">
-                <a:solidFill>
-                  <a:srgbClr val="660033"/>
-                </a:solidFill>
-                <a:ea typeface="微軟正黑體" pitchFamily="34" charset="-120"/>
-              </a:rPr>
-              <a:t> </a:t>
-            </a:r>
-            <a:r>
-              <a:rPr lang="en-US" sz="3600" b="1" dirty="0" err="1">
-                <a:solidFill>
-                  <a:srgbClr val="660033"/>
-                </a:solidFill>
-                <a:ea typeface="微軟正黑體" pitchFamily="34" charset="-120"/>
-              </a:rPr>
-              <a:t>nhau</a:t>
-            </a:r>
-            <a:r>
-              <a:rPr lang="en-US" sz="3600" b="1" dirty="0">
-                <a:solidFill>
-                  <a:srgbClr val="660033"/>
-                </a:solidFill>
-                <a:ea typeface="微軟正黑體" pitchFamily="34" charset="-120"/>
-              </a:rPr>
-              <a:t>, </a:t>
-            </a:r>
-            <a:r>
-              <a:rPr lang="en-US" sz="3600" b="1" dirty="0" err="1">
-                <a:solidFill>
-                  <a:srgbClr val="660033"/>
-                </a:solidFill>
-                <a:ea typeface="微軟正黑體" pitchFamily="34" charset="-120"/>
-              </a:rPr>
-              <a:t>gia</a:t>
-            </a:r>
-            <a:r>
-              <a:rPr lang="en-US" sz="3600" b="1" dirty="0">
-                <a:solidFill>
-                  <a:srgbClr val="660033"/>
-                </a:solidFill>
-                <a:ea typeface="微軟正黑體" pitchFamily="34" charset="-120"/>
-              </a:rPr>
-              <a:t> </a:t>
-            </a:r>
-            <a:r>
-              <a:rPr lang="en-US" sz="3600" b="1" dirty="0" err="1">
-                <a:solidFill>
-                  <a:srgbClr val="660033"/>
-                </a:solidFill>
-                <a:ea typeface="微軟正黑體" pitchFamily="34" charset="-120"/>
-              </a:rPr>
-              <a:t>đình</a:t>
-            </a:r>
-            <a:r>
-              <a:rPr lang="en-US" sz="3600" b="1" dirty="0">
-                <a:solidFill>
-                  <a:srgbClr val="660033"/>
-                </a:solidFill>
-                <a:ea typeface="微軟正黑體" pitchFamily="34" charset="-120"/>
-              </a:rPr>
-              <a:t> </a:t>
-            </a:r>
-            <a:r>
-              <a:rPr lang="en-US" sz="3600" b="1" dirty="0" err="1">
-                <a:solidFill>
-                  <a:srgbClr val="660033"/>
-                </a:solidFill>
-                <a:ea typeface="微軟正黑體" pitchFamily="34" charset="-120"/>
-              </a:rPr>
-              <a:t>sẽ</a:t>
-            </a:r>
-            <a:r>
-              <a:rPr lang="en-US" sz="3600" b="1" dirty="0">
-                <a:solidFill>
-                  <a:srgbClr val="660033"/>
-                </a:solidFill>
-                <a:ea typeface="微軟正黑體" pitchFamily="34" charset="-120"/>
-              </a:rPr>
-              <a:t> </a:t>
-            </a:r>
-            <a:r>
-              <a:rPr lang="en-US" sz="3600" b="1" dirty="0" err="1">
-                <a:solidFill>
-                  <a:srgbClr val="660033"/>
-                </a:solidFill>
-                <a:ea typeface="微軟正黑體" pitchFamily="34" charset="-120"/>
-              </a:rPr>
-              <a:t>hạnh</a:t>
-            </a:r>
-            <a:r>
-              <a:rPr lang="en-US" sz="3600" b="1" dirty="0">
-                <a:solidFill>
-                  <a:srgbClr val="660033"/>
-                </a:solidFill>
-                <a:ea typeface="微軟正黑體" pitchFamily="34" charset="-120"/>
-              </a:rPr>
-              <a:t> </a:t>
-            </a:r>
-            <a:r>
-              <a:rPr lang="en-US" sz="3600" b="1" dirty="0" err="1">
-                <a:solidFill>
-                  <a:srgbClr val="660033"/>
-                </a:solidFill>
-                <a:ea typeface="微軟正黑體" pitchFamily="34" charset="-120"/>
-              </a:rPr>
-              <a:t>phúc</a:t>
-            </a:r>
-            <a:endParaRPr lang="vi-VN" sz="3600" b="1" dirty="0">
-              <a:solidFill>
-                <a:srgbClr val="660033"/>
-              </a:solidFill>
-              <a:ea typeface="微軟正黑體" pitchFamily="34" charset="-120"/>
-            </a:endParaRPr>
+              <a:rPr lang="vi-VN" sz="3600" b="1" dirty="0">
+                <a:solidFill>
+                  <a:srgbClr val="660033"/>
+                </a:solidFill>
+                <a:ea typeface="微軟正黑體" pitchFamily="34" charset="-120"/>
+              </a:rPr>
+              <a:t>Mỗi người biết tha thứ, gia đình mới hạnh phúc</a:t>
+            </a:r>
           </a:p>
         </p:txBody>
       </p:sp>
@@ -5769,6 +4935,114 @@
                 </a:solidFill>
                 <a:ea typeface="微軟正黑體" pitchFamily="34" charset="-120"/>
               </a:rPr>
+              <a:t>ngự</a:t>
+            </a:r>
+            <a:r>
+              <a:rPr lang="en-US" sz="3600" b="1" dirty="0">
+                <a:solidFill>
+                  <a:srgbClr val="660033"/>
+                </a:solidFill>
+                <a:ea typeface="微軟正黑體" pitchFamily="34" charset="-120"/>
+              </a:rPr>
+              <a:t> </a:t>
+            </a:r>
+            <a:r>
+              <a:rPr lang="en-US" sz="3600" b="1" dirty="0" err="1">
+                <a:solidFill>
+                  <a:srgbClr val="660033"/>
+                </a:solidFill>
+                <a:ea typeface="微軟正黑體" pitchFamily="34" charset="-120"/>
+              </a:rPr>
+              <a:t>trị</a:t>
+            </a:r>
+            <a:r>
+              <a:rPr lang="en-US" sz="3600" b="1" dirty="0">
+                <a:solidFill>
+                  <a:srgbClr val="660033"/>
+                </a:solidFill>
+                <a:ea typeface="微軟正黑體" pitchFamily="34" charset="-120"/>
+              </a:rPr>
+              <a:t> </a:t>
+            </a:r>
+            <a:r>
+              <a:rPr lang="en-US" sz="3600" b="1" dirty="0" err="1">
+                <a:solidFill>
+                  <a:srgbClr val="660033"/>
+                </a:solidFill>
+                <a:ea typeface="微軟正黑體" pitchFamily="34" charset="-120"/>
+              </a:rPr>
+              <a:t>trong</a:t>
+            </a:r>
+            <a:r>
+              <a:rPr lang="en-US" sz="3600" b="1" dirty="0">
+                <a:solidFill>
+                  <a:srgbClr val="660033"/>
+                </a:solidFill>
+                <a:ea typeface="微軟正黑體" pitchFamily="34" charset="-120"/>
+              </a:rPr>
+              <a:t> </a:t>
+            </a:r>
+            <a:r>
+              <a:rPr lang="en-US" sz="3600" b="1" dirty="0" err="1">
+                <a:solidFill>
+                  <a:srgbClr val="660033"/>
+                </a:solidFill>
+                <a:ea typeface="微軟正黑體" pitchFamily="34" charset="-120"/>
+              </a:rPr>
+              <a:t>gia</a:t>
+            </a:r>
+            <a:r>
+              <a:rPr lang="en-US" sz="3600" b="1" dirty="0">
+                <a:solidFill>
+                  <a:srgbClr val="660033"/>
+                </a:solidFill>
+                <a:ea typeface="微軟正黑體" pitchFamily="34" charset="-120"/>
+              </a:rPr>
+              <a:t> </a:t>
+            </a:r>
+            <a:r>
+              <a:rPr lang="en-US" sz="3600" b="1" dirty="0" err="1">
+                <a:solidFill>
+                  <a:srgbClr val="660033"/>
+                </a:solidFill>
+                <a:ea typeface="微軟正黑體" pitchFamily="34" charset="-120"/>
+              </a:rPr>
+              <a:t>đình</a:t>
+            </a:r>
+            <a:r>
+              <a:rPr lang="en-US" sz="3600" b="1" dirty="0">
+                <a:solidFill>
+                  <a:srgbClr val="660033"/>
+                </a:solidFill>
+                <a:ea typeface="微軟正黑體" pitchFamily="34" charset="-120"/>
+              </a:rPr>
+              <a:t> </a:t>
+            </a:r>
+            <a:r>
+              <a:rPr lang="en-US" sz="3600" b="1" dirty="0" err="1">
+                <a:solidFill>
+                  <a:srgbClr val="660033"/>
+                </a:solidFill>
+                <a:ea typeface="微軟正黑體" pitchFamily="34" charset="-120"/>
+              </a:rPr>
+              <a:t>bạn</a:t>
+            </a:r>
+            <a:r>
+              <a:rPr lang="en-US" sz="3600" b="1" dirty="0">
+                <a:solidFill>
+                  <a:srgbClr val="660033"/>
+                </a:solidFill>
+                <a:ea typeface="微軟正黑體" pitchFamily="34" charset="-120"/>
+              </a:rPr>
+              <a:t> </a:t>
+            </a:r>
+            <a:r>
+              <a:rPr lang="en-US" sz="3600" b="1" dirty="0" err="1">
+                <a:solidFill>
+                  <a:srgbClr val="660033"/>
+                </a:solidFill>
+                <a:ea typeface="微軟正黑體" pitchFamily="34" charset="-120"/>
+              </a:rPr>
               <a:t>mỗi</a:t>
             </a:r>
             <a:r>
@@ -5788,96 +5062,6 @@
                 <a:ea typeface="微軟正黑體" pitchFamily="34" charset="-120"/>
               </a:rPr>
               <a:t>ngày</a:t>
-            </a:r>
-            <a:r>
-              <a:rPr lang="en-US" sz="3600" b="1" dirty="0">
-                <a:solidFill>
-                  <a:srgbClr val="660033"/>
-                </a:solidFill>
-                <a:ea typeface="微軟正黑體" pitchFamily="34" charset="-120"/>
-              </a:rPr>
-              <a:t> </a:t>
-            </a:r>
-            <a:r>
-              <a:rPr lang="en-US" sz="3600" b="1" dirty="0" err="1">
-                <a:solidFill>
-                  <a:srgbClr val="660033"/>
-                </a:solidFill>
-                <a:ea typeface="微軟正黑體" pitchFamily="34" charset="-120"/>
-              </a:rPr>
-              <a:t>cư</a:t>
-            </a:r>
-            <a:r>
-              <a:rPr lang="en-US" sz="3600" b="1" dirty="0">
-                <a:solidFill>
-                  <a:srgbClr val="660033"/>
-                </a:solidFill>
-                <a:ea typeface="微軟正黑體" pitchFamily="34" charset="-120"/>
-              </a:rPr>
-              <a:t> </a:t>
-            </a:r>
-            <a:r>
-              <a:rPr lang="en-US" sz="3600" b="1" dirty="0" err="1">
-                <a:solidFill>
-                  <a:srgbClr val="660033"/>
-                </a:solidFill>
-                <a:ea typeface="微軟正黑體" pitchFamily="34" charset="-120"/>
-              </a:rPr>
-              <a:t>ngụ</a:t>
-            </a:r>
-            <a:r>
-              <a:rPr lang="en-US" sz="3600" b="1" dirty="0">
-                <a:solidFill>
-                  <a:srgbClr val="660033"/>
-                </a:solidFill>
-                <a:ea typeface="微軟正黑體" pitchFamily="34" charset="-120"/>
-              </a:rPr>
-              <a:t> </a:t>
-            </a:r>
-            <a:r>
-              <a:rPr lang="en-US" sz="3600" b="1" dirty="0" err="1">
-                <a:solidFill>
-                  <a:srgbClr val="660033"/>
-                </a:solidFill>
-                <a:ea typeface="微軟正黑體" pitchFamily="34" charset="-120"/>
-              </a:rPr>
-              <a:t>trong</a:t>
-            </a:r>
-            <a:r>
-              <a:rPr lang="en-US" sz="3600" b="1" dirty="0">
-                <a:solidFill>
-                  <a:srgbClr val="660033"/>
-                </a:solidFill>
-                <a:ea typeface="微軟正黑體" pitchFamily="34" charset="-120"/>
-              </a:rPr>
-              <a:t> </a:t>
-            </a:r>
-            <a:r>
-              <a:rPr lang="en-US" sz="3600" b="1" dirty="0" err="1">
-                <a:solidFill>
-                  <a:srgbClr val="660033"/>
-                </a:solidFill>
-                <a:ea typeface="微軟正黑體" pitchFamily="34" charset="-120"/>
-              </a:rPr>
-              <a:t>nhà</a:t>
-            </a:r>
-            <a:r>
-              <a:rPr lang="en-US" sz="3600" b="1" dirty="0">
-                <a:solidFill>
-                  <a:srgbClr val="660033"/>
-                </a:solidFill>
-                <a:ea typeface="微軟正黑體" pitchFamily="34" charset="-120"/>
-              </a:rPr>
-              <a:t> </a:t>
-            </a:r>
-            <a:r>
-              <a:rPr lang="en-US" sz="3600" b="1" dirty="0" err="1">
-                <a:solidFill>
-                  <a:srgbClr val="660033"/>
-                </a:solidFill>
-                <a:ea typeface="微軟正黑體" pitchFamily="34" charset="-120"/>
-              </a:rPr>
-              <a:t>bạn</a:t>
             </a:r>
             <a:endParaRPr lang="vi-VN" sz="3600" b="1" dirty="0">
               <a:solidFill>
@@ -6275,6 +5459,114 @@
                 </a:solidFill>
                 <a:ea typeface="微軟正黑體" pitchFamily="34" charset="-120"/>
               </a:rPr>
+              <a:t>tngự</a:t>
+            </a:r>
+            <a:r>
+              <a:rPr lang="en-US" sz="3600" b="1" dirty="0">
+                <a:solidFill>
+                  <a:srgbClr val="660033"/>
+                </a:solidFill>
+                <a:ea typeface="微軟正黑體" pitchFamily="34" charset="-120"/>
+              </a:rPr>
+              <a:t> </a:t>
+            </a:r>
+            <a:r>
+              <a:rPr lang="en-US" sz="3600" b="1" dirty="0" err="1">
+                <a:solidFill>
+                  <a:srgbClr val="660033"/>
+                </a:solidFill>
+                <a:ea typeface="微軟正黑體" pitchFamily="34" charset="-120"/>
+              </a:rPr>
+              <a:t>trị</a:t>
+            </a:r>
+            <a:r>
+              <a:rPr lang="en-US" sz="3600" b="1" dirty="0">
+                <a:solidFill>
+                  <a:srgbClr val="660033"/>
+                </a:solidFill>
+                <a:ea typeface="微軟正黑體" pitchFamily="34" charset="-120"/>
+              </a:rPr>
+              <a:t> </a:t>
+            </a:r>
+            <a:r>
+              <a:rPr lang="en-US" sz="3600" b="1" dirty="0" err="1">
+                <a:solidFill>
+                  <a:srgbClr val="660033"/>
+                </a:solidFill>
+                <a:ea typeface="微軟正黑體" pitchFamily="34" charset="-120"/>
+              </a:rPr>
+              <a:t>trong</a:t>
+            </a:r>
+            <a:r>
+              <a:rPr lang="en-US" sz="3600" b="1" dirty="0">
+                <a:solidFill>
+                  <a:srgbClr val="660033"/>
+                </a:solidFill>
+                <a:ea typeface="微軟正黑體" pitchFamily="34" charset="-120"/>
+              </a:rPr>
+              <a:t> </a:t>
+            </a:r>
+            <a:r>
+              <a:rPr lang="en-US" sz="3600" b="1" dirty="0" err="1">
+                <a:solidFill>
+                  <a:srgbClr val="660033"/>
+                </a:solidFill>
+                <a:ea typeface="微軟正黑體" pitchFamily="34" charset="-120"/>
+              </a:rPr>
+              <a:t>gia</a:t>
+            </a:r>
+            <a:r>
+              <a:rPr lang="en-US" sz="3600" b="1" dirty="0">
+                <a:solidFill>
+                  <a:srgbClr val="660033"/>
+                </a:solidFill>
+                <a:ea typeface="微軟正黑體" pitchFamily="34" charset="-120"/>
+              </a:rPr>
+              <a:t> </a:t>
+            </a:r>
+            <a:r>
+              <a:rPr lang="en-US" sz="3600" b="1" dirty="0" err="1">
+                <a:solidFill>
+                  <a:srgbClr val="660033"/>
+                </a:solidFill>
+                <a:ea typeface="微軟正黑體" pitchFamily="34" charset="-120"/>
+              </a:rPr>
+              <a:t>đình</a:t>
+            </a:r>
+            <a:r>
+              <a:rPr lang="en-US" sz="3600" b="1" dirty="0">
+                <a:solidFill>
+                  <a:srgbClr val="660033"/>
+                </a:solidFill>
+                <a:ea typeface="微軟正黑體" pitchFamily="34" charset="-120"/>
+              </a:rPr>
+              <a:t> </a:t>
+            </a:r>
+            <a:r>
+              <a:rPr lang="en-US" sz="3600" b="1" dirty="0" err="1">
+                <a:solidFill>
+                  <a:srgbClr val="660033"/>
+                </a:solidFill>
+                <a:ea typeface="微軟正黑體" pitchFamily="34" charset="-120"/>
+              </a:rPr>
+              <a:t>tôi</a:t>
+            </a:r>
+            <a:r>
+              <a:rPr lang="en-US" sz="3600" b="1" dirty="0">
+                <a:solidFill>
+                  <a:srgbClr val="660033"/>
+                </a:solidFill>
+                <a:ea typeface="微軟正黑體" pitchFamily="34" charset="-120"/>
+              </a:rPr>
+              <a:t> </a:t>
+            </a:r>
+            <a:r>
+              <a:rPr lang="en-US" sz="3600" b="1" dirty="0" err="1">
+                <a:solidFill>
+                  <a:srgbClr val="660033"/>
+                </a:solidFill>
+                <a:ea typeface="微軟正黑體" pitchFamily="34" charset="-120"/>
+              </a:rPr>
               <a:t>mỗi</a:t>
             </a:r>
             <a:r>
@@ -6294,96 +5586,6 @@
                 <a:ea typeface="微軟正黑體" pitchFamily="34" charset="-120"/>
               </a:rPr>
               <a:t>ngày</a:t>
-            </a:r>
-            <a:r>
-              <a:rPr lang="en-US" sz="3600" b="1" dirty="0">
-                <a:solidFill>
-                  <a:srgbClr val="660033"/>
-                </a:solidFill>
-                <a:ea typeface="微軟正黑體" pitchFamily="34" charset="-120"/>
-              </a:rPr>
-              <a:t> </a:t>
-            </a:r>
-            <a:r>
-              <a:rPr lang="en-US" sz="3600" b="1" dirty="0" err="1">
-                <a:solidFill>
-                  <a:srgbClr val="660033"/>
-                </a:solidFill>
-                <a:ea typeface="微軟正黑體" pitchFamily="34" charset="-120"/>
-              </a:rPr>
-              <a:t>cư</a:t>
-            </a:r>
-            <a:r>
-              <a:rPr lang="en-US" sz="3600" b="1" dirty="0">
-                <a:solidFill>
-                  <a:srgbClr val="660033"/>
-                </a:solidFill>
-                <a:ea typeface="微軟正黑體" pitchFamily="34" charset="-120"/>
-              </a:rPr>
-              <a:t> </a:t>
-            </a:r>
-            <a:r>
-              <a:rPr lang="en-US" sz="3600" b="1" dirty="0" err="1">
-                <a:solidFill>
-                  <a:srgbClr val="660033"/>
-                </a:solidFill>
-                <a:ea typeface="微軟正黑體" pitchFamily="34" charset="-120"/>
-              </a:rPr>
-              <a:t>ngụ</a:t>
-            </a:r>
-            <a:r>
-              <a:rPr lang="en-US" sz="3600" b="1" dirty="0">
-                <a:solidFill>
-                  <a:srgbClr val="660033"/>
-                </a:solidFill>
-                <a:ea typeface="微軟正黑體" pitchFamily="34" charset="-120"/>
-              </a:rPr>
-              <a:t> </a:t>
-            </a:r>
-            <a:r>
-              <a:rPr lang="en-US" sz="3600" b="1" dirty="0" err="1">
-                <a:solidFill>
-                  <a:srgbClr val="660033"/>
-                </a:solidFill>
-                <a:ea typeface="微軟正黑體" pitchFamily="34" charset="-120"/>
-              </a:rPr>
-              <a:t>trong</a:t>
-            </a:r>
-            <a:r>
-              <a:rPr lang="en-US" sz="3600" b="1" dirty="0">
-                <a:solidFill>
-                  <a:srgbClr val="660033"/>
-                </a:solidFill>
-                <a:ea typeface="微軟正黑體" pitchFamily="34" charset="-120"/>
-              </a:rPr>
-              <a:t> </a:t>
-            </a:r>
-            <a:r>
-              <a:rPr lang="en-US" sz="3600" b="1" dirty="0" err="1">
-                <a:solidFill>
-                  <a:srgbClr val="660033"/>
-                </a:solidFill>
-                <a:ea typeface="微軟正黑體" pitchFamily="34" charset="-120"/>
-              </a:rPr>
-              <a:t>nhà</a:t>
-            </a:r>
-            <a:r>
-              <a:rPr lang="en-US" sz="3600" b="1" dirty="0">
-                <a:solidFill>
-                  <a:srgbClr val="660033"/>
-                </a:solidFill>
-                <a:ea typeface="微軟正黑體" pitchFamily="34" charset="-120"/>
-              </a:rPr>
-              <a:t> </a:t>
-            </a:r>
-            <a:r>
-              <a:rPr lang="en-US" sz="3600" b="1" dirty="0" err="1">
-                <a:solidFill>
-                  <a:srgbClr val="660033"/>
-                </a:solidFill>
-                <a:ea typeface="微軟正黑體" pitchFamily="34" charset="-120"/>
-              </a:rPr>
-              <a:t>tôi</a:t>
             </a:r>
             <a:endParaRPr lang="vi-VN" sz="3600" b="1" dirty="0">
               <a:solidFill>
@@ -6709,7 +5911,7 @@
                 </a:solidFill>
                 <a:ea typeface="微軟正黑體" pitchFamily="34" charset="-120"/>
               </a:rPr>
-              <a:t>Bất</a:t>
+              <a:t>Dù</a:t>
             </a:r>
             <a:r>
               <a:rPr lang="en-US" sz="3600" b="1" dirty="0">
@@ -6727,7 +5929,7 @@
                 </a:solidFill>
                 <a:ea typeface="微軟正黑體" pitchFamily="34" charset="-120"/>
               </a:rPr>
-              <a:t>luận</a:t>
+              <a:t>ngày</a:t>
             </a:r>
             <a:r>
               <a:rPr lang="en-US" sz="3600" b="1" dirty="0">
@@ -6736,7 +5938,7 @@
                 </a:solidFill>
                 <a:ea typeface="微軟正黑體" pitchFamily="34" charset="-120"/>
               </a:rPr>
-              <a:t> </a:t>
+              <a:t> hay </a:t>
             </a:r>
             <a:r>
               <a:rPr lang="en-US" sz="3600" b="1" dirty="0" err="1">
@@ -6745,7 +5947,7 @@
                 </a:solidFill>
                 <a:ea typeface="微軟正黑體" pitchFamily="34" charset="-120"/>
               </a:rPr>
-              <a:t>là</a:t>
+              <a:t>đêm</a:t>
             </a:r>
             <a:r>
               <a:rPr lang="en-US" sz="3600" b="1" dirty="0">
@@ -6754,43 +5956,7 @@
                 </a:solidFill>
                 <a:ea typeface="微軟正黑體" pitchFamily="34" charset="-120"/>
               </a:rPr>
-              <a:t> </a:t>
-            </a:r>
-            <a:r>
-              <a:rPr lang="en-US" sz="3600" b="1" dirty="0" err="1">
-                <a:solidFill>
-                  <a:srgbClr val="660033"/>
-                </a:solidFill>
-                <a:ea typeface="微軟正黑體" pitchFamily="34" charset="-120"/>
-              </a:rPr>
-              <a:t>ngày</a:t>
-            </a:r>
-            <a:r>
-              <a:rPr lang="en-US" sz="3600" b="1" dirty="0">
-                <a:solidFill>
-                  <a:srgbClr val="660033"/>
-                </a:solidFill>
-                <a:ea typeface="微軟正黑體" pitchFamily="34" charset="-120"/>
-              </a:rPr>
-              <a:t> </a:t>
-            </a:r>
-            <a:r>
-              <a:rPr lang="en-US" sz="3600" b="1" dirty="0" err="1">
-                <a:solidFill>
-                  <a:srgbClr val="660033"/>
-                </a:solidFill>
-                <a:ea typeface="微軟正黑體" pitchFamily="34" charset="-120"/>
-              </a:rPr>
-              <a:t>đêm</a:t>
-            </a:r>
-            <a:r>
-              <a:rPr lang="en-US" sz="3600" b="1" dirty="0">
-                <a:solidFill>
-                  <a:srgbClr val="660033"/>
-                </a:solidFill>
-                <a:ea typeface="微軟正黑體" pitchFamily="34" charset="-120"/>
-              </a:rPr>
-              <a:t> hay </a:t>
+              <a:t>, </a:t>
             </a:r>
             <a:r>
               <a:rPr lang="en-US" sz="3600" b="1" dirty="0" err="1">
@@ -7179,7 +6345,7 @@
                 </a:solidFill>
                 <a:ea typeface="微軟正黑體" pitchFamily="34" charset="-120"/>
               </a:rPr>
-              <a:t>Hãy</a:t>
+              <a:t>Toàn</a:t>
             </a:r>
             <a:r>
               <a:rPr lang="en-US" sz="3600" b="1" dirty="0">
@@ -7197,6 +6363,24 @@
                 </a:solidFill>
                 <a:ea typeface="微軟正黑體" pitchFamily="34" charset="-120"/>
               </a:rPr>
+              <a:t>tâm</a:t>
+            </a:r>
+            <a:r>
+              <a:rPr lang="en-US" sz="3600" b="1" dirty="0">
+                <a:solidFill>
+                  <a:srgbClr val="660033"/>
+                </a:solidFill>
+                <a:ea typeface="微軟正黑體" pitchFamily="34" charset="-120"/>
+              </a:rPr>
+              <a:t> </a:t>
+            </a:r>
+            <a:r>
+              <a:rPr lang="en-US" sz="3600" b="1" dirty="0" err="1">
+                <a:solidFill>
+                  <a:srgbClr val="660033"/>
+                </a:solidFill>
+                <a:ea typeface="微軟正黑體" pitchFamily="34" charset="-120"/>
+              </a:rPr>
               <a:t>toàn</a:t>
             </a:r>
             <a:r>
@@ -7206,6 +6390,24 @@
                 </a:solidFill>
                 <a:ea typeface="微軟正黑體" pitchFamily="34" charset="-120"/>
               </a:rPr>
+              <a:t> ý </a:t>
+            </a:r>
+            <a:r>
+              <a:rPr lang="en-US" sz="3600" b="1" dirty="0" err="1">
+                <a:solidFill>
+                  <a:srgbClr val="660033"/>
+                </a:solidFill>
+                <a:ea typeface="微軟正黑體" pitchFamily="34" charset="-120"/>
+              </a:rPr>
+              <a:t>yêu</a:t>
+            </a:r>
+            <a:r>
+              <a:rPr lang="en-US" sz="3600" b="1" dirty="0">
+                <a:solidFill>
+                  <a:srgbClr val="660033"/>
+                </a:solidFill>
+                <a:ea typeface="微軟正黑體" pitchFamily="34" charset="-120"/>
+              </a:rPr>
               <a:t> </a:t>
             </a:r>
             <a:r>
@@ -7215,7 +6417,7 @@
                 </a:solidFill>
                 <a:ea typeface="微軟正黑體" pitchFamily="34" charset="-120"/>
               </a:rPr>
-              <a:t>tâm</a:t>
+              <a:t>gia</a:t>
             </a:r>
             <a:r>
               <a:rPr lang="en-US" sz="3600" b="1" dirty="0">
@@ -7233,7 +6435,7 @@
                 </a:solidFill>
                 <a:ea typeface="微軟正黑體" pitchFamily="34" charset="-120"/>
               </a:rPr>
-              <a:t>toàn</a:t>
+              <a:t>đình</a:t>
             </a:r>
             <a:r>
               <a:rPr lang="en-US" sz="3600" b="1" dirty="0">
@@ -7242,7 +6444,7 @@
                 </a:solidFill>
                 <a:ea typeface="微軟正黑體" pitchFamily="34" charset="-120"/>
               </a:rPr>
-              <a:t> ý </a:t>
+              <a:t> </a:t>
             </a:r>
             <a:r>
               <a:rPr lang="en-US" sz="3600" b="1" dirty="0" err="1">
@@ -7251,7 +6453,7 @@
                 </a:solidFill>
                 <a:ea typeface="微軟正黑體" pitchFamily="34" charset="-120"/>
               </a:rPr>
-              <a:t>yêu</a:t>
+              <a:t>của</a:t>
             </a:r>
             <a:r>
               <a:rPr lang="en-US" sz="3600" b="1" dirty="0">
@@ -7269,7 +6471,7 @@
                 </a:solidFill>
                 <a:ea typeface="微軟正黑體" pitchFamily="34" charset="-120"/>
               </a:rPr>
-              <a:t>gia</a:t>
+              <a:t>chúng</a:t>
             </a:r>
             <a:r>
               <a:rPr lang="en-US" sz="3600" b="1" dirty="0">
@@ -7278,34 +6480,7 @@
                 </a:solidFill>
                 <a:ea typeface="微軟正黑體" pitchFamily="34" charset="-120"/>
               </a:rPr>
-              <a:t> </a:t>
-            </a:r>
-            <a:r>
-              <a:rPr lang="en-US" sz="3600" b="1" dirty="0" err="1">
-                <a:solidFill>
-                  <a:srgbClr val="660033"/>
-                </a:solidFill>
-                <a:ea typeface="微軟正黑體" pitchFamily="34" charset="-120"/>
-              </a:rPr>
-              <a:t>đình</a:t>
-            </a:r>
-            <a:r>
-              <a:rPr lang="en-US" sz="3600" b="1" dirty="0">
-                <a:solidFill>
-                  <a:srgbClr val="660033"/>
-                </a:solidFill>
-                <a:ea typeface="微軟正黑體" pitchFamily="34" charset="-120"/>
-              </a:rPr>
-              <a:t> </a:t>
-            </a:r>
-            <a:r>
-              <a:rPr lang="en-US" sz="3600" b="1" dirty="0" err="1">
-                <a:solidFill>
-                  <a:srgbClr val="660033"/>
-                </a:solidFill>
-                <a:ea typeface="微軟正黑體" pitchFamily="34" charset="-120"/>
-              </a:rPr>
-              <a:t>mình</a:t>
+              <a:t> ta</a:t>
             </a:r>
             <a:endParaRPr lang="vi-VN" sz="3600" b="1" dirty="0">
               <a:solidFill>
